--- a/mimic_readmission.pptx
+++ b/mimic_readmission.pptx
@@ -4,20 +4,23 @@
   <p:sldMasterIdLst>
     <p:sldMasterId id="2147483648" r:id="rId1"/>
   </p:sldMasterIdLst>
+  <p:notesMasterIdLst>
+    <p:notesMasterId r:id="rId13"/>
+  </p:notesMasterIdLst>
   <p:sldIdLst>
-    <p:sldId id="256" r:id="rId7"/>
-    <p:sldId id="257" r:id="rId9"/>
-    <p:sldId id="258" r:id="rId10"/>
-    <p:sldId id="259" r:id="rId11"/>
-    <p:sldId id="260" r:id="rId12"/>
-    <p:sldId id="261" r:id="rId13"/>
-    <p:sldId id="262" r:id="rId14"/>
-    <p:sldId id="263" r:id="rId15"/>
-    <p:sldId id="264" r:id="rId16"/>
-    <p:sldId id="265" r:id="rId17"/>
-    <p:sldId id="266" r:id="rId18"/>
+    <p:sldId id="256" r:id="rId2"/>
+    <p:sldId id="257" r:id="rId3"/>
+    <p:sldId id="258" r:id="rId4"/>
+    <p:sldId id="259" r:id="rId5"/>
+    <p:sldId id="260" r:id="rId6"/>
+    <p:sldId id="261" r:id="rId7"/>
+    <p:sldId id="262" r:id="rId8"/>
+    <p:sldId id="263" r:id="rId9"/>
+    <p:sldId id="264" r:id="rId10"/>
+    <p:sldId id="265" r:id="rId11"/>
+    <p:sldId id="266" r:id="rId12"/>
   </p:sldIdLst>
-  <p:sldSz cx="12188952" cy="6858000" type="screen4x3"/>
+  <p:sldSz cx="12188825" cy="6858000"/>
   <p:notesSz cx="6858000" cy="9144000"/>
   <p:defaultTextStyle>
     <a:defPPr>
@@ -114,11 +117,27 @@
       </a:defRPr>
     </a:lvl9pPr>
   </p:defaultTextStyle>
+  <p:extLst>
+    <p:ext uri="{EFAFB233-063F-42B5-8137-9DF3F51BA10A}">
+      <p15:sldGuideLst xmlns:p15="http://schemas.microsoft.com/office/powerpoint/2012/main">
+        <p15:guide id="1" orient="horz" pos="2160">
+          <p15:clr>
+            <a:srgbClr val="A4A3A4"/>
+          </p15:clr>
+        </p15:guide>
+        <p15:guide id="2" pos="2880">
+          <p15:clr>
+            <a:srgbClr val="A4A3A4"/>
+          </p15:clr>
+        </p15:guide>
+      </p15:sldGuideLst>
+    </p:ext>
+  </p:extLst>
 </p:presentation>
 </file>
 
 <file path=ppt/notesMasters/notesMaster1.xml><?xml version="1.0" encoding="utf-8"?>
-<p:notesMaster xmlns:a="http://schemas.openxmlformats.org/drawingml/2006/main" xmlns:p="http://schemas.openxmlformats.org/presentationml/2006/main" xmlns:r="http://schemas.openxmlformats.org/officeDocument/2006/relationships">
+<p:notesMaster xmlns:a="http://schemas.openxmlformats.org/drawingml/2006/main" xmlns:r="http://schemas.openxmlformats.org/officeDocument/2006/relationships" xmlns:p="http://schemas.openxmlformats.org/presentationml/2006/main">
   <p:cSld>
     <p:bg>
       <p:bgRef idx="1001">
@@ -139,241 +158,16 @@
           <a:chExt cx="0" cy="0"/>
         </a:xfrm>
       </p:grpSpPr>
-      <p:sp>
-        <p:nvSpPr>
-          <p:cNvPr id="2" name="Header Placeholder 1"/>
-          <p:cNvSpPr>
-            <a:spLocks noGrp="1"/>
-          </p:cNvSpPr>
-          <p:nvPr>
-            <p:ph type="hdr" sz="quarter"/>
-          </p:nvPr>
-        </p:nvSpPr>
-        <p:spPr>
-          <a:xfrm>
-            <a:off x="0" y="0"/>
-            <a:ext cx="2971800" cy="457200"/>
-          </a:xfrm>
-          <a:prstGeom prst="rect">
-            <a:avLst/>
-          </a:prstGeom>
-        </p:spPr>
-        <p:txBody>
-          <a:bodyPr vert="horz" lIns="91440" tIns="45720" rIns="91440" bIns="45720" rtlCol="0"/>
-          <a:lstStyle>
-            <a:lvl1pPr algn="l">
-              <a:defRPr sz="1200"/>
-            </a:lvl1pPr>
-          </a:lstStyle>
-          <a:p>
-            <a:endParaRPr lang="en-US"/>
-          </a:p>
-        </p:txBody>
-      </p:sp>
-      <p:sp>
-        <p:nvSpPr>
-          <p:cNvPr id="3" name="Date Placeholder 2"/>
-          <p:cNvSpPr>
-            <a:spLocks noGrp="1"/>
-          </p:cNvSpPr>
-          <p:nvPr>
-            <p:ph type="dt" idx="1"/>
-          </p:nvPr>
-        </p:nvSpPr>
-        <p:spPr>
-          <a:xfrm>
-            <a:off x="3884613" y="0"/>
-            <a:ext cx="2971800" cy="457200"/>
-          </a:xfrm>
-          <a:prstGeom prst="rect">
-            <a:avLst/>
-          </a:prstGeom>
-        </p:spPr>
-        <p:txBody>
-          <a:bodyPr vert="horz" lIns="91440" tIns="45720" rIns="91440" bIns="45720" rtlCol="0"/>
-          <a:lstStyle>
-            <a:lvl1pPr algn="r">
-              <a:defRPr sz="1200"/>
-            </a:lvl1pPr>
-          </a:lstStyle>
-          <a:p>
-            <a:fld id="{0F89C1C7-3DCD-1040-A9CF-14679D8B5DDD}" type="datetimeFigureOut">
-              <a:rPr lang="en-US" smtClean="0"/>
-              <a:t>10/17/16</a:t>
-            </a:fld>
-            <a:endParaRPr lang="en-US"/>
-          </a:p>
-        </p:txBody>
-      </p:sp>
-      <p:sp>
-        <p:nvSpPr>
-          <p:cNvPr id="4" name="Slide Image Placeholder 3"/>
-          <p:cNvSpPr>
-            <a:spLocks noGrp="1" noRot="1" noChangeAspect="1"/>
-          </p:cNvSpPr>
-          <p:nvPr>
-            <p:ph type="sldImg" idx="2"/>
-          </p:nvPr>
-        </p:nvSpPr>
-        <p:spPr>
-          <a:xfrm>
-            <a:off x="1143000" y="685800"/>
-            <a:ext cx="4572000" cy="3429000"/>
-          </a:xfrm>
-          <a:prstGeom prst="rect">
-            <a:avLst/>
-          </a:prstGeom>
-          <a:noFill/>
-          <a:ln w="12700">
-            <a:solidFill>
-              <a:prstClr val="black"/>
-            </a:solidFill>
-          </a:ln>
-        </p:spPr>
-        <p:txBody>
-          <a:bodyPr vert="horz" lIns="91440" tIns="45720" rIns="91440" bIns="45720" rtlCol="0" anchor="ctr"/>
-          <a:lstStyle/>
-          <a:p>
-            <a:endParaRPr lang="en-US"/>
-          </a:p>
-        </p:txBody>
-      </p:sp>
-      <p:sp>
-        <p:nvSpPr>
-          <p:cNvPr id="5" name="Notes Placeholder 4"/>
-          <p:cNvSpPr>
-            <a:spLocks noGrp="1"/>
-          </p:cNvSpPr>
-          <p:nvPr>
-            <p:ph type="body" sz="quarter" idx="3"/>
-          </p:nvPr>
-        </p:nvSpPr>
-        <p:spPr>
-          <a:xfrm>
-            <a:off x="685800" y="4343400"/>
-            <a:ext cx="5486400" cy="4114800"/>
-          </a:xfrm>
-          <a:prstGeom prst="rect">
-            <a:avLst/>
-          </a:prstGeom>
-        </p:spPr>
-        <p:txBody>
-          <a:bodyPr vert="horz" lIns="91440" tIns="45720" rIns="91440" bIns="45720" rtlCol="0"/>
-          <a:lstStyle/>
-          <a:p>
-            <a:pPr lvl="0"/>
-            <a:r>
-              <a:rPr lang="en-US" smtClean="0"/>
-              <a:t>Click to edit Master text styles</a:t>
-            </a:r>
-          </a:p>
-          <a:p>
-            <a:pPr lvl="1"/>
-            <a:r>
-              <a:rPr lang="en-US" smtClean="0"/>
-              <a:t>Second level</a:t>
-            </a:r>
-          </a:p>
-          <a:p>
-            <a:pPr lvl="2"/>
-            <a:r>
-              <a:rPr lang="en-US" smtClean="0"/>
-              <a:t>Third level</a:t>
-            </a:r>
-          </a:p>
-          <a:p>
-            <a:pPr lvl="3"/>
-            <a:r>
-              <a:rPr lang="en-US" smtClean="0"/>
-              <a:t>Fourth level</a:t>
-            </a:r>
-          </a:p>
-          <a:p>
-            <a:pPr lvl="4"/>
-            <a:r>
-              <a:rPr lang="en-US" smtClean="0"/>
-              <a:t>Fifth level</a:t>
-            </a:r>
-            <a:endParaRPr lang="en-US"/>
-          </a:p>
-        </p:txBody>
-      </p:sp>
-      <p:sp>
-        <p:nvSpPr>
-          <p:cNvPr id="6" name="Footer Placeholder 5"/>
-          <p:cNvSpPr>
-            <a:spLocks noGrp="1"/>
-          </p:cNvSpPr>
-          <p:nvPr>
-            <p:ph type="ftr" sz="quarter" idx="4"/>
-          </p:nvPr>
-        </p:nvSpPr>
-        <p:spPr>
-          <a:xfrm>
-            <a:off x="0" y="8685213"/>
-            <a:ext cx="2971800" cy="457200"/>
-          </a:xfrm>
-          <a:prstGeom prst="rect">
-            <a:avLst/>
-          </a:prstGeom>
-        </p:spPr>
-        <p:txBody>
-          <a:bodyPr vert="horz" lIns="91440" tIns="45720" rIns="91440" bIns="45720" rtlCol="0" anchor="b"/>
-          <a:lstStyle>
-            <a:lvl1pPr algn="l">
-              <a:defRPr sz="1200"/>
-            </a:lvl1pPr>
-          </a:lstStyle>
-          <a:p>
-            <a:endParaRPr lang="en-US"/>
-          </a:p>
-        </p:txBody>
-      </p:sp>
-      <p:sp>
-        <p:nvSpPr>
-          <p:cNvPr id="7" name="Slide Number Placeholder 6"/>
-          <p:cNvSpPr>
-            <a:spLocks noGrp="1"/>
-          </p:cNvSpPr>
-          <p:nvPr>
-            <p:ph type="sldNum" sz="quarter" idx="5"/>
-          </p:nvPr>
-        </p:nvSpPr>
-        <p:spPr>
-          <a:xfrm>
-            <a:off x="3884613" y="8685213"/>
-            <a:ext cx="2971800" cy="457200"/>
-          </a:xfrm>
-          <a:prstGeom prst="rect">
-            <a:avLst/>
-          </a:prstGeom>
-        </p:spPr>
-        <p:txBody>
-          <a:bodyPr vert="horz" lIns="91440" tIns="45720" rIns="91440" bIns="45720" rtlCol="0" anchor="b"/>
-          <a:lstStyle>
-            <a:lvl1pPr algn="r">
-              <a:defRPr sz="1200"/>
-            </a:lvl1pPr>
-          </a:lstStyle>
-          <a:p>
-            <a:fld id="{BB5E49A5-4136-284D-997B-48E1D791AD67}" type="slidenum">
-              <a:rPr lang="en-US" smtClean="0"/>
-              <a:t>‹#›</a:t>
-            </a:fld>
-            <a:endParaRPr lang="en-US"/>
-          </a:p>
-        </p:txBody>
-      </p:sp>
     </p:spTree>
     <p:extLst>
       <p:ext uri="{BB962C8B-B14F-4D97-AF65-F5344CB8AC3E}">
-        <p14:creationId xmlns:p14="http://schemas.microsoft.com/office/powerpoint/2010/main" val="2623252185"/>
+        <p14:creationId xmlns:p14="http://schemas.microsoft.com/office/powerpoint/2010/main" val="710589496"/>
       </p:ext>
     </p:extLst>
   </p:cSld>
   <p:clrMap bg1="lt1" tx1="dk1" bg2="lt2" tx2="dk2" accent1="accent1" accent2="accent2" accent3="accent3" accent4="accent4" accent5="accent5" accent6="accent6" hlink="hlink" folHlink="folHlink"/>
   <p:notesStyle>
-    <a:lvl1pPr marL="0" algn="l" defTabSz="457200" rtl="0" eaLnBrk="1" latinLnBrk="0" hangingPunct="1">
+    <a:lvl1pPr marL="0" algn="l" defTabSz="914400" rtl="0" eaLnBrk="1" latinLnBrk="0" hangingPunct="1">
       <a:defRPr sz="1200" kern="1200">
         <a:solidFill>
           <a:schemeClr val="tx1"/>
@@ -383,7 +177,7 @@
         <a:cs typeface="+mn-cs"/>
       </a:defRPr>
     </a:lvl1pPr>
-    <a:lvl2pPr marL="457200" algn="l" defTabSz="457200" rtl="0" eaLnBrk="1" latinLnBrk="0" hangingPunct="1">
+    <a:lvl2pPr marL="457200" algn="l" defTabSz="914400" rtl="0" eaLnBrk="1" latinLnBrk="0" hangingPunct="1">
       <a:defRPr sz="1200" kern="1200">
         <a:solidFill>
           <a:schemeClr val="tx1"/>
@@ -393,7 +187,7 @@
         <a:cs typeface="+mn-cs"/>
       </a:defRPr>
     </a:lvl2pPr>
-    <a:lvl3pPr marL="914400" algn="l" defTabSz="457200" rtl="0" eaLnBrk="1" latinLnBrk="0" hangingPunct="1">
+    <a:lvl3pPr marL="914400" algn="l" defTabSz="914400" rtl="0" eaLnBrk="1" latinLnBrk="0" hangingPunct="1">
       <a:defRPr sz="1200" kern="1200">
         <a:solidFill>
           <a:schemeClr val="tx1"/>
@@ -403,7 +197,7 @@
         <a:cs typeface="+mn-cs"/>
       </a:defRPr>
     </a:lvl3pPr>
-    <a:lvl4pPr marL="1371600" algn="l" defTabSz="457200" rtl="0" eaLnBrk="1" latinLnBrk="0" hangingPunct="1">
+    <a:lvl4pPr marL="1371600" algn="l" defTabSz="914400" rtl="0" eaLnBrk="1" latinLnBrk="0" hangingPunct="1">
       <a:defRPr sz="1200" kern="1200">
         <a:solidFill>
           <a:schemeClr val="tx1"/>
@@ -413,7 +207,7 @@
         <a:cs typeface="+mn-cs"/>
       </a:defRPr>
     </a:lvl4pPr>
-    <a:lvl5pPr marL="1828800" algn="l" defTabSz="457200" rtl="0" eaLnBrk="1" latinLnBrk="0" hangingPunct="1">
+    <a:lvl5pPr marL="1828800" algn="l" defTabSz="914400" rtl="0" eaLnBrk="1" latinLnBrk="0" hangingPunct="1">
       <a:defRPr sz="1200" kern="1200">
         <a:solidFill>
           <a:schemeClr val="tx1"/>
@@ -423,7 +217,7 @@
         <a:cs typeface="+mn-cs"/>
       </a:defRPr>
     </a:lvl5pPr>
-    <a:lvl6pPr marL="2286000" algn="l" defTabSz="457200" rtl="0" eaLnBrk="1" latinLnBrk="0" hangingPunct="1">
+    <a:lvl6pPr marL="2286000" algn="l" defTabSz="914400" rtl="0" eaLnBrk="1" latinLnBrk="0" hangingPunct="1">
       <a:defRPr sz="1200" kern="1200">
         <a:solidFill>
           <a:schemeClr val="tx1"/>
@@ -433,7 +227,7 @@
         <a:cs typeface="+mn-cs"/>
       </a:defRPr>
     </a:lvl6pPr>
-    <a:lvl7pPr marL="2743200" algn="l" defTabSz="457200" rtl="0" eaLnBrk="1" latinLnBrk="0" hangingPunct="1">
+    <a:lvl7pPr marL="2743200" algn="l" defTabSz="914400" rtl="0" eaLnBrk="1" latinLnBrk="0" hangingPunct="1">
       <a:defRPr sz="1200" kern="1200">
         <a:solidFill>
           <a:schemeClr val="tx1"/>
@@ -443,7 +237,7 @@
         <a:cs typeface="+mn-cs"/>
       </a:defRPr>
     </a:lvl7pPr>
-    <a:lvl8pPr marL="3200400" algn="l" defTabSz="457200" rtl="0" eaLnBrk="1" latinLnBrk="0" hangingPunct="1">
+    <a:lvl8pPr marL="3200400" algn="l" defTabSz="914400" rtl="0" eaLnBrk="1" latinLnBrk="0" hangingPunct="1">
       <a:defRPr sz="1200" kern="1200">
         <a:solidFill>
           <a:schemeClr val="tx1"/>
@@ -453,7 +247,7 @@
         <a:cs typeface="+mn-cs"/>
       </a:defRPr>
     </a:lvl8pPr>
-    <a:lvl9pPr marL="3657600" algn="l" defTabSz="457200" rtl="0" eaLnBrk="1" latinLnBrk="0" hangingPunct="1">
+    <a:lvl9pPr marL="3657600" algn="l" defTabSz="914400" rtl="0" eaLnBrk="1" latinLnBrk="0" hangingPunct="1">
       <a:defRPr sz="1200" kern="1200">
         <a:solidFill>
           <a:schemeClr val="tx1"/>
@@ -468,7 +262,7 @@
 </file>
 
 <file path=ppt/notesSlides/notesSlide1.xml><?xml version="1.0" encoding="utf-8"?>
-<p:notes xmlns:a="http://schemas.openxmlformats.org/drawingml/2006/main" xmlns:p="http://schemas.openxmlformats.org/presentationml/2006/main" xmlns:r="http://schemas.openxmlformats.org/officeDocument/2006/relationships">
+<p:notes xmlns:a="http://schemas.openxmlformats.org/drawingml/2006/main" xmlns:r="http://schemas.openxmlformats.org/officeDocument/2006/relationships" xmlns:p="http://schemas.openxmlformats.org/presentationml/2006/main">
   <p:cSld>
     <p:spTree>
       <p:nvGrpSpPr>
@@ -488,7 +282,7 @@
         <p:nvSpPr>
           <p:cNvPr id="2" name="Slide Image Placeholder 1"/>
           <p:cNvSpPr>
-            <a:spLocks noGrp="1"/>
+            <a:spLocks noGrp="1" noRot="1" noChangeAspect="1"/>
           </p:cNvSpPr>
           <p:nvPr>
             <p:ph type="sldImg" idx="2"/>
@@ -503,7 +297,7 @@
             <a:spLocks noGrp="1"/>
           </p:cNvSpPr>
           <p:nvPr>
-            <p:ph type="body" idx="3" sz="quarter"/>
+            <p:ph type="body" sz="quarter" idx="3"/>
           </p:nvPr>
         </p:nvSpPr>
         <p:spPr/>
@@ -512,25 +306,108 @@
           <a:lstStyle/>
           <a:p>
             <a:r>
+              <a:rPr dirty="0"/>
               <a:t>Welcome to this tutorial on 30-day hospital readmission prediction using MIMIC-III data.</a:t>
             </a:r>
           </a:p>
-          <a:p/>
-          <a:p>
-            <a:r>
-              <a:t>GitHub repository: https://github.com/manoharbyc-dev/ai-healthcare</a:t>
-            </a:r>
-          </a:p>
-          <a:p/>
-          <a:p>
-            <a:r>
-              <a:t>Google Colab notebook: [PASTE YOUR COLAB LINK HERE after uploading to Drive]</a:t>
-            </a:r>
-          </a:p>
-          <a:p/>
-          <a:p>
-            <a:r>
-              <a:t>To reproduce: open the Colab link, run all cells in order. The notebook fetches data from BigQuery, trains three ML models, and generates all figures shown in this presentation.</a:t>
+          <a:p>
+            <a:endParaRPr dirty="0"/>
+          </a:p>
+          <a:p>
+            <a:r>
+              <a:rPr dirty="0"/>
+              <a:t>GitHub repository: https://</a:t>
+            </a:r>
+            <a:r>
+              <a:rPr dirty="0" err="1"/>
+              <a:t>github.com</a:t>
+            </a:r>
+            <a:r>
+              <a:rPr dirty="0"/>
+              <a:t>/</a:t>
+            </a:r>
+            <a:r>
+              <a:rPr dirty="0" err="1"/>
+              <a:t>manoharbyc</a:t>
+            </a:r>
+            <a:r>
+              <a:rPr dirty="0"/>
+              <a:t>-dev/ai-healthcare</a:t>
+            </a:r>
+          </a:p>
+          <a:p>
+            <a:endParaRPr dirty="0"/>
+          </a:p>
+          <a:p>
+            <a:r>
+              <a:rPr dirty="0"/>
+              <a:t>Google </a:t>
+            </a:r>
+            <a:r>
+              <a:rPr dirty="0" err="1"/>
+              <a:t>Colab</a:t>
+            </a:r>
+            <a:r>
+              <a:rPr dirty="0"/>
+              <a:t> notebook: </a:t>
+            </a:r>
+            <a:r>
+              <a:rPr lang="en-US" dirty="0"/>
+              <a:t>https://</a:t>
+            </a:r>
+            <a:r>
+              <a:rPr lang="en-US" dirty="0" err="1"/>
+              <a:t>colab.research.google.com</a:t>
+            </a:r>
+            <a:r>
+              <a:rPr lang="en-US" dirty="0"/>
+              <a:t>/</a:t>
+            </a:r>
+            <a:r>
+              <a:rPr lang="en-US" dirty="0" err="1"/>
+              <a:t>github</a:t>
+            </a:r>
+            <a:r>
+              <a:rPr lang="en-US" dirty="0"/>
+              <a:t>/</a:t>
+            </a:r>
+            <a:r>
+              <a:rPr lang="en-US" dirty="0" err="1"/>
+              <a:t>manoharbyc</a:t>
+            </a:r>
+            <a:r>
+              <a:rPr lang="en-US" dirty="0"/>
+              <a:t>-dev/ai-healthcare/blob/main/</a:t>
+            </a:r>
+            <a:r>
+              <a:rPr lang="en-US" dirty="0" err="1"/>
+              <a:t>mimic_readmission.ipynb</a:t>
+            </a:r>
+            <a:endParaRPr dirty="0"/>
+          </a:p>
+          <a:p>
+            <a:endParaRPr lang="en-US" dirty="0"/>
+          </a:p>
+          <a:p>
+            <a:r>
+              <a:rPr dirty="0"/>
+              <a:t>To reproduce: open the </a:t>
+            </a:r>
+            <a:r>
+              <a:rPr dirty="0" err="1"/>
+              <a:t>Colab</a:t>
+            </a:r>
+            <a:r>
+              <a:rPr dirty="0"/>
+              <a:t> link, run all cells in order. The notebook fetches data from </a:t>
+            </a:r>
+            <a:r>
+              <a:rPr dirty="0" err="1"/>
+              <a:t>BigQuery</a:t>
+            </a:r>
+            <a:r>
+              <a:rPr dirty="0"/>
+              <a:t>, trains three ML models, and generates all figures shown in this presentation.</a:t>
             </a:r>
           </a:p>
         </p:txBody>
@@ -542,7 +419,7 @@
             <a:spLocks noGrp="1"/>
           </p:cNvSpPr>
           <p:nvPr>
-            <p:ph type="sldNum" idx="5" sz="quarter"/>
+            <p:ph type="sldNum" sz="quarter" idx="5"/>
           </p:nvPr>
         </p:nvSpPr>
         <p:spPr/>
@@ -556,7 +433,7 @@
 </file>
 
 <file path=ppt/notesSlides/notesSlide10.xml><?xml version="1.0" encoding="utf-8"?>
-<p:notes xmlns:a="http://schemas.openxmlformats.org/drawingml/2006/main" xmlns:p="http://schemas.openxmlformats.org/presentationml/2006/main" xmlns:r="http://schemas.openxmlformats.org/officeDocument/2006/relationships">
+<p:notes xmlns:a="http://schemas.openxmlformats.org/drawingml/2006/main" xmlns:r="http://schemas.openxmlformats.org/officeDocument/2006/relationships" xmlns:p="http://schemas.openxmlformats.org/presentationml/2006/main">
   <p:cSld>
     <p:spTree>
       <p:nvGrpSpPr>
@@ -576,7 +453,7 @@
         <p:nvSpPr>
           <p:cNvPr id="2" name="Slide Image Placeholder 1"/>
           <p:cNvSpPr>
-            <a:spLocks noGrp="1"/>
+            <a:spLocks noGrp="1" noRot="1" noChangeAspect="1"/>
           </p:cNvSpPr>
           <p:nvPr>
             <p:ph type="sldImg" idx="2"/>
@@ -591,7 +468,7 @@
             <a:spLocks noGrp="1"/>
           </p:cNvSpPr>
           <p:nvPr>
-            <p:ph type="body" idx="3" sz="quarter"/>
+            <p:ph type="body" sz="quarter" idx="3"/>
           </p:nvPr>
         </p:nvSpPr>
         <p:spPr/>
@@ -612,7 +489,7 @@
             <a:spLocks noGrp="1"/>
           </p:cNvSpPr>
           <p:nvPr>
-            <p:ph type="sldNum" idx="5" sz="quarter"/>
+            <p:ph type="sldNum" sz="quarter" idx="5"/>
           </p:nvPr>
         </p:nvSpPr>
         <p:spPr/>
@@ -626,7 +503,7 @@
 </file>
 
 <file path=ppt/notesSlides/notesSlide11.xml><?xml version="1.0" encoding="utf-8"?>
-<p:notes xmlns:a="http://schemas.openxmlformats.org/drawingml/2006/main" xmlns:p="http://schemas.openxmlformats.org/presentationml/2006/main" xmlns:r="http://schemas.openxmlformats.org/officeDocument/2006/relationships">
+<p:notes xmlns:a="http://schemas.openxmlformats.org/drawingml/2006/main" xmlns:r="http://schemas.openxmlformats.org/officeDocument/2006/relationships" xmlns:p="http://schemas.openxmlformats.org/presentationml/2006/main">
   <p:cSld>
     <p:spTree>
       <p:nvGrpSpPr>
@@ -646,7 +523,7 @@
         <p:nvSpPr>
           <p:cNvPr id="2" name="Slide Image Placeholder 1"/>
           <p:cNvSpPr>
-            <a:spLocks noGrp="1"/>
+            <a:spLocks noGrp="1" noRot="1" noChangeAspect="1"/>
           </p:cNvSpPr>
           <p:nvPr>
             <p:ph type="sldImg" idx="2"/>
@@ -661,7 +538,7 @@
             <a:spLocks noGrp="1"/>
           </p:cNvSpPr>
           <p:nvPr>
-            <p:ph type="body" idx="3" sz="quarter"/>
+            <p:ph type="body" sz="quarter" idx="3"/>
           </p:nvPr>
         </p:nvSpPr>
         <p:spPr/>
@@ -693,7 +570,9 @@
               <a:t>- SHAP very slow: X_test is large; use shap_values = explainer.shap_values(X_test.sample(1000)) for a quick demo</a:t>
             </a:r>
           </a:p>
-          <a:p/>
+          <a:p>
+            <a:endParaRPr/>
+          </a:p>
           <a:p>
             <a:r>
               <a:t>GitHub: https://github.com/manoharbyc-dev/ai-healthcare</a:t>
@@ -708,7 +587,7 @@
             <a:spLocks noGrp="1"/>
           </p:cNvSpPr>
           <p:nvPr>
-            <p:ph type="sldNum" idx="5" sz="quarter"/>
+            <p:ph type="sldNum" sz="quarter" idx="5"/>
           </p:nvPr>
         </p:nvSpPr>
         <p:spPr/>
@@ -722,7 +601,7 @@
 </file>
 
 <file path=ppt/notesSlides/notesSlide2.xml><?xml version="1.0" encoding="utf-8"?>
-<p:notes xmlns:a="http://schemas.openxmlformats.org/drawingml/2006/main" xmlns:p="http://schemas.openxmlformats.org/presentationml/2006/main" xmlns:r="http://schemas.openxmlformats.org/officeDocument/2006/relationships">
+<p:notes xmlns:a="http://schemas.openxmlformats.org/drawingml/2006/main" xmlns:r="http://schemas.openxmlformats.org/officeDocument/2006/relationships" xmlns:p="http://schemas.openxmlformats.org/presentationml/2006/main">
   <p:cSld>
     <p:spTree>
       <p:nvGrpSpPr>
@@ -742,7 +621,7 @@
         <p:nvSpPr>
           <p:cNvPr id="2" name="Slide Image Placeholder 1"/>
           <p:cNvSpPr>
-            <a:spLocks noGrp="1"/>
+            <a:spLocks noGrp="1" noRot="1" noChangeAspect="1"/>
           </p:cNvSpPr>
           <p:nvPr>
             <p:ph type="sldImg" idx="2"/>
@@ -757,7 +636,7 @@
             <a:spLocks noGrp="1"/>
           </p:cNvSpPr>
           <p:nvPr>
-            <p:ph type="body" idx="3" sz="quarter"/>
+            <p:ph type="body" sz="quarter" idx="3"/>
           </p:nvPr>
         </p:nvSpPr>
         <p:spPr/>
@@ -778,7 +657,7 @@
             <a:spLocks noGrp="1"/>
           </p:cNvSpPr>
           <p:nvPr>
-            <p:ph type="sldNum" idx="5" sz="quarter"/>
+            <p:ph type="sldNum" sz="quarter" idx="5"/>
           </p:nvPr>
         </p:nvSpPr>
         <p:spPr/>
@@ -792,7 +671,7 @@
 </file>
 
 <file path=ppt/notesSlides/notesSlide3.xml><?xml version="1.0" encoding="utf-8"?>
-<p:notes xmlns:a="http://schemas.openxmlformats.org/drawingml/2006/main" xmlns:p="http://schemas.openxmlformats.org/presentationml/2006/main" xmlns:r="http://schemas.openxmlformats.org/officeDocument/2006/relationships">
+<p:notes xmlns:a="http://schemas.openxmlformats.org/drawingml/2006/main" xmlns:r="http://schemas.openxmlformats.org/officeDocument/2006/relationships" xmlns:p="http://schemas.openxmlformats.org/presentationml/2006/main">
   <p:cSld>
     <p:spTree>
       <p:nvGrpSpPr>
@@ -812,7 +691,7 @@
         <p:nvSpPr>
           <p:cNvPr id="2" name="Slide Image Placeholder 1"/>
           <p:cNvSpPr>
-            <a:spLocks noGrp="1"/>
+            <a:spLocks noGrp="1" noRot="1" noChangeAspect="1"/>
           </p:cNvSpPr>
           <p:nvPr>
             <p:ph type="sldImg" idx="2"/>
@@ -827,7 +706,7 @@
             <a:spLocks noGrp="1"/>
           </p:cNvSpPr>
           <p:nvPr>
-            <p:ph type="body" idx="3" sz="quarter"/>
+            <p:ph type="body" sz="quarter" idx="3"/>
           </p:nvPr>
         </p:nvSpPr>
         <p:spPr/>
@@ -848,7 +727,7 @@
             <a:spLocks noGrp="1"/>
           </p:cNvSpPr>
           <p:nvPr>
-            <p:ph type="sldNum" idx="5" sz="quarter"/>
+            <p:ph type="sldNum" sz="quarter" idx="5"/>
           </p:nvPr>
         </p:nvSpPr>
         <p:spPr/>
@@ -862,7 +741,7 @@
 </file>
 
 <file path=ppt/notesSlides/notesSlide4.xml><?xml version="1.0" encoding="utf-8"?>
-<p:notes xmlns:a="http://schemas.openxmlformats.org/drawingml/2006/main" xmlns:p="http://schemas.openxmlformats.org/presentationml/2006/main" xmlns:r="http://schemas.openxmlformats.org/officeDocument/2006/relationships">
+<p:notes xmlns:a="http://schemas.openxmlformats.org/drawingml/2006/main" xmlns:r="http://schemas.openxmlformats.org/officeDocument/2006/relationships" xmlns:p="http://schemas.openxmlformats.org/presentationml/2006/main">
   <p:cSld>
     <p:spTree>
       <p:nvGrpSpPr>
@@ -882,7 +761,7 @@
         <p:nvSpPr>
           <p:cNvPr id="2" name="Slide Image Placeholder 1"/>
           <p:cNvSpPr>
-            <a:spLocks noGrp="1"/>
+            <a:spLocks noGrp="1" noRot="1" noChangeAspect="1"/>
           </p:cNvSpPr>
           <p:nvPr>
             <p:ph type="sldImg" idx="2"/>
@@ -897,7 +776,7 @@
             <a:spLocks noGrp="1"/>
           </p:cNvSpPr>
           <p:nvPr>
-            <p:ph type="body" idx="3" sz="quarter"/>
+            <p:ph type="body" sz="quarter" idx="3"/>
           </p:nvPr>
         </p:nvSpPr>
         <p:spPr/>
@@ -918,7 +797,7 @@
             <a:spLocks noGrp="1"/>
           </p:cNvSpPr>
           <p:nvPr>
-            <p:ph type="sldNum" idx="5" sz="quarter"/>
+            <p:ph type="sldNum" sz="quarter" idx="5"/>
           </p:nvPr>
         </p:nvSpPr>
         <p:spPr/>
@@ -932,7 +811,7 @@
 </file>
 
 <file path=ppt/notesSlides/notesSlide5.xml><?xml version="1.0" encoding="utf-8"?>
-<p:notes xmlns:a="http://schemas.openxmlformats.org/drawingml/2006/main" xmlns:p="http://schemas.openxmlformats.org/presentationml/2006/main" xmlns:r="http://schemas.openxmlformats.org/officeDocument/2006/relationships">
+<p:notes xmlns:a="http://schemas.openxmlformats.org/drawingml/2006/main" xmlns:r="http://schemas.openxmlformats.org/officeDocument/2006/relationships" xmlns:p="http://schemas.openxmlformats.org/presentationml/2006/main">
   <p:cSld>
     <p:spTree>
       <p:nvGrpSpPr>
@@ -952,7 +831,7 @@
         <p:nvSpPr>
           <p:cNvPr id="2" name="Slide Image Placeholder 1"/>
           <p:cNvSpPr>
-            <a:spLocks noGrp="1"/>
+            <a:spLocks noGrp="1" noRot="1" noChangeAspect="1"/>
           </p:cNvSpPr>
           <p:nvPr>
             <p:ph type="sldImg" idx="2"/>
@@ -967,7 +846,7 @@
             <a:spLocks noGrp="1"/>
           </p:cNvSpPr>
           <p:nvPr>
-            <p:ph type="body" idx="3" sz="quarter"/>
+            <p:ph type="body" sz="quarter" idx="3"/>
           </p:nvPr>
         </p:nvSpPr>
         <p:spPr/>
@@ -988,7 +867,7 @@
             <a:spLocks noGrp="1"/>
           </p:cNvSpPr>
           <p:nvPr>
-            <p:ph type="sldNum" idx="5" sz="quarter"/>
+            <p:ph type="sldNum" sz="quarter" idx="5"/>
           </p:nvPr>
         </p:nvSpPr>
         <p:spPr/>
@@ -1002,7 +881,7 @@
 </file>
 
 <file path=ppt/notesSlides/notesSlide6.xml><?xml version="1.0" encoding="utf-8"?>
-<p:notes xmlns:a="http://schemas.openxmlformats.org/drawingml/2006/main" xmlns:p="http://schemas.openxmlformats.org/presentationml/2006/main" xmlns:r="http://schemas.openxmlformats.org/officeDocument/2006/relationships">
+<p:notes xmlns:a="http://schemas.openxmlformats.org/drawingml/2006/main" xmlns:r="http://schemas.openxmlformats.org/officeDocument/2006/relationships" xmlns:p="http://schemas.openxmlformats.org/presentationml/2006/main">
   <p:cSld>
     <p:spTree>
       <p:nvGrpSpPr>
@@ -1022,7 +901,7 @@
         <p:nvSpPr>
           <p:cNvPr id="2" name="Slide Image Placeholder 1"/>
           <p:cNvSpPr>
-            <a:spLocks noGrp="1"/>
+            <a:spLocks noGrp="1" noRot="1" noChangeAspect="1"/>
           </p:cNvSpPr>
           <p:nvPr>
             <p:ph type="sldImg" idx="2"/>
@@ -1037,7 +916,7 @@
             <a:spLocks noGrp="1"/>
           </p:cNvSpPr>
           <p:nvPr>
-            <p:ph type="body" idx="3" sz="quarter"/>
+            <p:ph type="body" sz="quarter" idx="3"/>
           </p:nvPr>
         </p:nvSpPr>
         <p:spPr/>
@@ -1058,7 +937,7 @@
             <a:spLocks noGrp="1"/>
           </p:cNvSpPr>
           <p:nvPr>
-            <p:ph type="sldNum" idx="5" sz="quarter"/>
+            <p:ph type="sldNum" sz="quarter" idx="5"/>
           </p:nvPr>
         </p:nvSpPr>
         <p:spPr/>
@@ -1072,7 +951,7 @@
 </file>
 
 <file path=ppt/notesSlides/notesSlide7.xml><?xml version="1.0" encoding="utf-8"?>
-<p:notes xmlns:a="http://schemas.openxmlformats.org/drawingml/2006/main" xmlns:p="http://schemas.openxmlformats.org/presentationml/2006/main" xmlns:r="http://schemas.openxmlformats.org/officeDocument/2006/relationships">
+<p:notes xmlns:a="http://schemas.openxmlformats.org/drawingml/2006/main" xmlns:r="http://schemas.openxmlformats.org/officeDocument/2006/relationships" xmlns:p="http://schemas.openxmlformats.org/presentationml/2006/main">
   <p:cSld>
     <p:spTree>
       <p:nvGrpSpPr>
@@ -1092,7 +971,7 @@
         <p:nvSpPr>
           <p:cNvPr id="2" name="Slide Image Placeholder 1"/>
           <p:cNvSpPr>
-            <a:spLocks noGrp="1"/>
+            <a:spLocks noGrp="1" noRot="1" noChangeAspect="1"/>
           </p:cNvSpPr>
           <p:nvPr>
             <p:ph type="sldImg" idx="2"/>
@@ -1107,7 +986,7 @@
             <a:spLocks noGrp="1"/>
           </p:cNvSpPr>
           <p:nvPr>
-            <p:ph type="body" idx="3" sz="quarter"/>
+            <p:ph type="body" sz="quarter" idx="3"/>
           </p:nvPr>
         </p:nvSpPr>
         <p:spPr/>
@@ -1128,7 +1007,7 @@
             <a:spLocks noGrp="1"/>
           </p:cNvSpPr>
           <p:nvPr>
-            <p:ph type="sldNum" idx="5" sz="quarter"/>
+            <p:ph type="sldNum" sz="quarter" idx="5"/>
           </p:nvPr>
         </p:nvSpPr>
         <p:spPr/>
@@ -1142,7 +1021,7 @@
 </file>
 
 <file path=ppt/notesSlides/notesSlide8.xml><?xml version="1.0" encoding="utf-8"?>
-<p:notes xmlns:a="http://schemas.openxmlformats.org/drawingml/2006/main" xmlns:p="http://schemas.openxmlformats.org/presentationml/2006/main" xmlns:r="http://schemas.openxmlformats.org/officeDocument/2006/relationships">
+<p:notes xmlns:a="http://schemas.openxmlformats.org/drawingml/2006/main" xmlns:r="http://schemas.openxmlformats.org/officeDocument/2006/relationships" xmlns:p="http://schemas.openxmlformats.org/presentationml/2006/main">
   <p:cSld>
     <p:spTree>
       <p:nvGrpSpPr>
@@ -1162,7 +1041,7 @@
         <p:nvSpPr>
           <p:cNvPr id="2" name="Slide Image Placeholder 1"/>
           <p:cNvSpPr>
-            <a:spLocks noGrp="1"/>
+            <a:spLocks noGrp="1" noRot="1" noChangeAspect="1"/>
           </p:cNvSpPr>
           <p:nvPr>
             <p:ph type="sldImg" idx="2"/>
@@ -1177,7 +1056,7 @@
             <a:spLocks noGrp="1"/>
           </p:cNvSpPr>
           <p:nvPr>
-            <p:ph type="body" idx="3" sz="quarter"/>
+            <p:ph type="body" sz="quarter" idx="3"/>
           </p:nvPr>
         </p:nvSpPr>
         <p:spPr/>
@@ -1198,7 +1077,7 @@
             <a:spLocks noGrp="1"/>
           </p:cNvSpPr>
           <p:nvPr>
-            <p:ph type="sldNum" idx="5" sz="quarter"/>
+            <p:ph type="sldNum" sz="quarter" idx="5"/>
           </p:nvPr>
         </p:nvSpPr>
         <p:spPr/>
@@ -1212,7 +1091,7 @@
 </file>
 
 <file path=ppt/notesSlides/notesSlide9.xml><?xml version="1.0" encoding="utf-8"?>
-<p:notes xmlns:a="http://schemas.openxmlformats.org/drawingml/2006/main" xmlns:p="http://schemas.openxmlformats.org/presentationml/2006/main" xmlns:r="http://schemas.openxmlformats.org/officeDocument/2006/relationships">
+<p:notes xmlns:a="http://schemas.openxmlformats.org/drawingml/2006/main" xmlns:r="http://schemas.openxmlformats.org/officeDocument/2006/relationships" xmlns:p="http://schemas.openxmlformats.org/presentationml/2006/main">
   <p:cSld>
     <p:spTree>
       <p:nvGrpSpPr>
@@ -1232,7 +1111,7 @@
         <p:nvSpPr>
           <p:cNvPr id="2" name="Slide Image Placeholder 1"/>
           <p:cNvSpPr>
-            <a:spLocks noGrp="1"/>
+            <a:spLocks noGrp="1" noRot="1" noChangeAspect="1"/>
           </p:cNvSpPr>
           <p:nvPr>
             <p:ph type="sldImg" idx="2"/>
@@ -1247,7 +1126,7 @@
             <a:spLocks noGrp="1"/>
           </p:cNvSpPr>
           <p:nvPr>
-            <p:ph type="body" idx="3" sz="quarter"/>
+            <p:ph type="body" sz="quarter" idx="3"/>
           </p:nvPr>
         </p:nvSpPr>
         <p:spPr/>
@@ -1268,7 +1147,7 @@
             <a:spLocks noGrp="1"/>
           </p:cNvSpPr>
           <p:nvPr>
-            <p:ph type="sldNum" idx="5" sz="quarter"/>
+            <p:ph type="sldNum" sz="quarter" idx="5"/>
           </p:nvPr>
         </p:nvSpPr>
         <p:spPr/>
@@ -1319,10 +1198,9 @@
           <a:lstStyle/>
           <a:p>
             <a:r>
-              <a:rPr lang="en-US" smtClean="0"/>
+              <a:rPr lang="en-US"/>
               <a:t>Click to edit Master title style</a:t>
             </a:r>
-            <a:endParaRPr lang="en-US"/>
           </a:p>
         </p:txBody>
       </p:sp>
@@ -1438,10 +1316,9 @@
           </a:lstStyle>
           <a:p>
             <a:r>
-              <a:rPr lang="en-US" smtClean="0"/>
+              <a:rPr lang="en-US"/>
               <a:t>Click to edit Master subtitle style</a:t>
             </a:r>
-            <a:endParaRPr lang="en-US"/>
           </a:p>
         </p:txBody>
       </p:sp>
@@ -1462,7 +1339,7 @@
           <a:p>
             <a:fld id="{5BCAD085-E8A6-8845-BD4E-CB4CCA059FC4}" type="datetimeFigureOut">
               <a:rPr lang="en-US" smtClean="0"/>
-              <a:t>1/27/13</a:t>
+              <a:t>7/7/26</a:t>
             </a:fld>
             <a:endParaRPr lang="en-US"/>
           </a:p>
@@ -1556,10 +1433,9 @@
           <a:lstStyle/>
           <a:p>
             <a:r>
-              <a:rPr lang="en-US" smtClean="0"/>
+              <a:rPr lang="en-US"/>
               <a:t>Click to edit Master title style</a:t>
             </a:r>
-            <a:endParaRPr lang="en-US"/>
           </a:p>
         </p:txBody>
       </p:sp>
@@ -1580,38 +1456,37 @@
           <a:p>
             <a:pPr lvl="0"/>
             <a:r>
-              <a:rPr lang="en-US" smtClean="0"/>
+              <a:rPr lang="en-US"/>
               <a:t>Click to edit Master text styles</a:t>
             </a:r>
           </a:p>
           <a:p>
             <a:pPr lvl="1"/>
             <a:r>
-              <a:rPr lang="en-US" smtClean="0"/>
+              <a:rPr lang="en-US"/>
               <a:t>Second level</a:t>
             </a:r>
           </a:p>
           <a:p>
             <a:pPr lvl="2"/>
             <a:r>
-              <a:rPr lang="en-US" smtClean="0"/>
+              <a:rPr lang="en-US"/>
               <a:t>Third level</a:t>
             </a:r>
           </a:p>
           <a:p>
             <a:pPr lvl="3"/>
             <a:r>
-              <a:rPr lang="en-US" smtClean="0"/>
+              <a:rPr lang="en-US"/>
               <a:t>Fourth level</a:t>
             </a:r>
           </a:p>
           <a:p>
             <a:pPr lvl="4"/>
             <a:r>
-              <a:rPr lang="en-US" smtClean="0"/>
+              <a:rPr lang="en-US"/>
               <a:t>Fifth level</a:t>
             </a:r>
-            <a:endParaRPr lang="en-US"/>
           </a:p>
         </p:txBody>
       </p:sp>
@@ -1632,7 +1507,7 @@
           <a:p>
             <a:fld id="{5BCAD085-E8A6-8845-BD4E-CB4CCA059FC4}" type="datetimeFigureOut">
               <a:rPr lang="en-US" smtClean="0"/>
-              <a:t>1/27/13</a:t>
+              <a:t>7/7/26</a:t>
             </a:fld>
             <a:endParaRPr lang="en-US"/>
           </a:p>
@@ -1731,10 +1606,9 @@
           <a:lstStyle/>
           <a:p>
             <a:r>
-              <a:rPr lang="en-US" smtClean="0"/>
+              <a:rPr lang="en-US"/>
               <a:t>Click to edit Master title style</a:t>
             </a:r>
-            <a:endParaRPr lang="en-US"/>
           </a:p>
         </p:txBody>
       </p:sp>
@@ -1760,38 +1634,37 @@
           <a:p>
             <a:pPr lvl="0"/>
             <a:r>
-              <a:rPr lang="en-US" smtClean="0"/>
+              <a:rPr lang="en-US"/>
               <a:t>Click to edit Master text styles</a:t>
             </a:r>
           </a:p>
           <a:p>
             <a:pPr lvl="1"/>
             <a:r>
-              <a:rPr lang="en-US" smtClean="0"/>
+              <a:rPr lang="en-US"/>
               <a:t>Second level</a:t>
             </a:r>
           </a:p>
           <a:p>
             <a:pPr lvl="2"/>
             <a:r>
-              <a:rPr lang="en-US" smtClean="0"/>
+              <a:rPr lang="en-US"/>
               <a:t>Third level</a:t>
             </a:r>
           </a:p>
           <a:p>
             <a:pPr lvl="3"/>
             <a:r>
-              <a:rPr lang="en-US" smtClean="0"/>
+              <a:rPr lang="en-US"/>
               <a:t>Fourth level</a:t>
             </a:r>
           </a:p>
           <a:p>
             <a:pPr lvl="4"/>
             <a:r>
-              <a:rPr lang="en-US" smtClean="0"/>
+              <a:rPr lang="en-US"/>
               <a:t>Fifth level</a:t>
             </a:r>
-            <a:endParaRPr lang="en-US"/>
           </a:p>
         </p:txBody>
       </p:sp>
@@ -1812,7 +1685,7 @@
           <a:p>
             <a:fld id="{5BCAD085-E8A6-8845-BD4E-CB4CCA059FC4}" type="datetimeFigureOut">
               <a:rPr lang="en-US" smtClean="0"/>
-              <a:t>1/27/13</a:t>
+              <a:t>7/7/26</a:t>
             </a:fld>
             <a:endParaRPr lang="en-US"/>
           </a:p>
@@ -1906,10 +1779,9 @@
           <a:lstStyle/>
           <a:p>
             <a:r>
-              <a:rPr lang="en-US" smtClean="0"/>
+              <a:rPr lang="en-US"/>
               <a:t>Click to edit Master title style</a:t>
             </a:r>
-            <a:endParaRPr lang="en-US"/>
           </a:p>
         </p:txBody>
       </p:sp>
@@ -1930,38 +1802,37 @@
           <a:p>
             <a:pPr lvl="0"/>
             <a:r>
-              <a:rPr lang="en-US" smtClean="0"/>
+              <a:rPr lang="en-US"/>
               <a:t>Click to edit Master text styles</a:t>
             </a:r>
           </a:p>
           <a:p>
             <a:pPr lvl="1"/>
             <a:r>
-              <a:rPr lang="en-US" smtClean="0"/>
+              <a:rPr lang="en-US"/>
               <a:t>Second level</a:t>
             </a:r>
           </a:p>
           <a:p>
             <a:pPr lvl="2"/>
             <a:r>
-              <a:rPr lang="en-US" smtClean="0"/>
+              <a:rPr lang="en-US"/>
               <a:t>Third level</a:t>
             </a:r>
           </a:p>
           <a:p>
             <a:pPr lvl="3"/>
             <a:r>
-              <a:rPr lang="en-US" smtClean="0"/>
+              <a:rPr lang="en-US"/>
               <a:t>Fourth level</a:t>
             </a:r>
           </a:p>
           <a:p>
             <a:pPr lvl="4"/>
             <a:r>
-              <a:rPr lang="en-US" smtClean="0"/>
+              <a:rPr lang="en-US"/>
               <a:t>Fifth level</a:t>
             </a:r>
-            <a:endParaRPr lang="en-US"/>
           </a:p>
         </p:txBody>
       </p:sp>
@@ -1982,7 +1853,7 @@
           <a:p>
             <a:fld id="{5BCAD085-E8A6-8845-BD4E-CB4CCA059FC4}" type="datetimeFigureOut">
               <a:rPr lang="en-US" smtClean="0"/>
-              <a:t>1/27/13</a:t>
+              <a:t>7/7/26</a:t>
             </a:fld>
             <a:endParaRPr lang="en-US"/>
           </a:p>
@@ -2085,10 +1956,9 @@
           </a:lstStyle>
           <a:p>
             <a:r>
-              <a:rPr lang="en-US" smtClean="0"/>
+              <a:rPr lang="en-US"/>
               <a:t>Click to edit Master title style</a:t>
             </a:r>
-            <a:endParaRPr lang="en-US"/>
           </a:p>
         </p:txBody>
       </p:sp>
@@ -2205,7 +2075,7 @@
           <a:p>
             <a:pPr lvl="0"/>
             <a:r>
-              <a:rPr lang="en-US" smtClean="0"/>
+              <a:rPr lang="en-US"/>
               <a:t>Click to edit Master text styles</a:t>
             </a:r>
           </a:p>
@@ -2228,7 +2098,7 @@
           <a:p>
             <a:fld id="{5BCAD085-E8A6-8845-BD4E-CB4CCA059FC4}" type="datetimeFigureOut">
               <a:rPr lang="en-US" smtClean="0"/>
-              <a:t>1/27/13</a:t>
+              <a:t>7/7/26</a:t>
             </a:fld>
             <a:endParaRPr lang="en-US"/>
           </a:p>
@@ -2322,10 +2192,9 @@
           <a:lstStyle/>
           <a:p>
             <a:r>
-              <a:rPr lang="en-US" smtClean="0"/>
+              <a:rPr lang="en-US"/>
               <a:t>Click to edit Master title style</a:t>
             </a:r>
-            <a:endParaRPr lang="en-US"/>
           </a:p>
         </p:txBody>
       </p:sp>
@@ -2379,38 +2248,37 @@
           <a:p>
             <a:pPr lvl="0"/>
             <a:r>
-              <a:rPr lang="en-US" smtClean="0"/>
+              <a:rPr lang="en-US"/>
               <a:t>Click to edit Master text styles</a:t>
             </a:r>
           </a:p>
           <a:p>
             <a:pPr lvl="1"/>
             <a:r>
-              <a:rPr lang="en-US" smtClean="0"/>
+              <a:rPr lang="en-US"/>
               <a:t>Second level</a:t>
             </a:r>
           </a:p>
           <a:p>
             <a:pPr lvl="2"/>
             <a:r>
-              <a:rPr lang="en-US" smtClean="0"/>
+              <a:rPr lang="en-US"/>
               <a:t>Third level</a:t>
             </a:r>
           </a:p>
           <a:p>
             <a:pPr lvl="3"/>
             <a:r>
-              <a:rPr lang="en-US" smtClean="0"/>
+              <a:rPr lang="en-US"/>
               <a:t>Fourth level</a:t>
             </a:r>
           </a:p>
           <a:p>
             <a:pPr lvl="4"/>
             <a:r>
-              <a:rPr lang="en-US" smtClean="0"/>
+              <a:rPr lang="en-US"/>
               <a:t>Fifth level</a:t>
             </a:r>
-            <a:endParaRPr lang="en-US"/>
           </a:p>
         </p:txBody>
       </p:sp>
@@ -2464,38 +2332,37 @@
           <a:p>
             <a:pPr lvl="0"/>
             <a:r>
-              <a:rPr lang="en-US" smtClean="0"/>
+              <a:rPr lang="en-US"/>
               <a:t>Click to edit Master text styles</a:t>
             </a:r>
           </a:p>
           <a:p>
             <a:pPr lvl="1"/>
             <a:r>
-              <a:rPr lang="en-US" smtClean="0"/>
+              <a:rPr lang="en-US"/>
               <a:t>Second level</a:t>
             </a:r>
           </a:p>
           <a:p>
             <a:pPr lvl="2"/>
             <a:r>
-              <a:rPr lang="en-US" smtClean="0"/>
+              <a:rPr lang="en-US"/>
               <a:t>Third level</a:t>
             </a:r>
           </a:p>
           <a:p>
             <a:pPr lvl="3"/>
             <a:r>
-              <a:rPr lang="en-US" smtClean="0"/>
+              <a:rPr lang="en-US"/>
               <a:t>Fourth level</a:t>
             </a:r>
           </a:p>
           <a:p>
             <a:pPr lvl="4"/>
             <a:r>
-              <a:rPr lang="en-US" smtClean="0"/>
+              <a:rPr lang="en-US"/>
               <a:t>Fifth level</a:t>
             </a:r>
-            <a:endParaRPr lang="en-US"/>
           </a:p>
         </p:txBody>
       </p:sp>
@@ -2516,7 +2383,7 @@
           <a:p>
             <a:fld id="{5BCAD085-E8A6-8845-BD4E-CB4CCA059FC4}" type="datetimeFigureOut">
               <a:rPr lang="en-US" smtClean="0"/>
-              <a:t>1/27/13</a:t>
+              <a:t>7/7/26</a:t>
             </a:fld>
             <a:endParaRPr lang="en-US"/>
           </a:p>
@@ -2614,10 +2481,9 @@
           </a:lstStyle>
           <a:p>
             <a:r>
-              <a:rPr lang="en-US" smtClean="0"/>
+              <a:rPr lang="en-US"/>
               <a:t>Click to edit Master title style</a:t>
             </a:r>
-            <a:endParaRPr lang="en-US"/>
           </a:p>
         </p:txBody>
       </p:sp>
@@ -2680,7 +2546,7 @@
           <a:p>
             <a:pPr lvl="0"/>
             <a:r>
-              <a:rPr lang="en-US" smtClean="0"/>
+              <a:rPr lang="en-US"/>
               <a:t>Click to edit Master text styles</a:t>
             </a:r>
           </a:p>
@@ -2736,38 +2602,37 @@
           <a:p>
             <a:pPr lvl="0"/>
             <a:r>
-              <a:rPr lang="en-US" smtClean="0"/>
+              <a:rPr lang="en-US"/>
               <a:t>Click to edit Master text styles</a:t>
             </a:r>
           </a:p>
           <a:p>
             <a:pPr lvl="1"/>
             <a:r>
-              <a:rPr lang="en-US" smtClean="0"/>
+              <a:rPr lang="en-US"/>
               <a:t>Second level</a:t>
             </a:r>
           </a:p>
           <a:p>
             <a:pPr lvl="2"/>
             <a:r>
-              <a:rPr lang="en-US" smtClean="0"/>
+              <a:rPr lang="en-US"/>
               <a:t>Third level</a:t>
             </a:r>
           </a:p>
           <a:p>
             <a:pPr lvl="3"/>
             <a:r>
-              <a:rPr lang="en-US" smtClean="0"/>
+              <a:rPr lang="en-US"/>
               <a:t>Fourth level</a:t>
             </a:r>
           </a:p>
           <a:p>
             <a:pPr lvl="4"/>
             <a:r>
-              <a:rPr lang="en-US" smtClean="0"/>
+              <a:rPr lang="en-US"/>
               <a:t>Fifth level</a:t>
             </a:r>
-            <a:endParaRPr lang="en-US"/>
           </a:p>
         </p:txBody>
       </p:sp>
@@ -2830,7 +2695,7 @@
           <a:p>
             <a:pPr lvl="0"/>
             <a:r>
-              <a:rPr lang="en-US" smtClean="0"/>
+              <a:rPr lang="en-US"/>
               <a:t>Click to edit Master text styles</a:t>
             </a:r>
           </a:p>
@@ -2886,38 +2751,37 @@
           <a:p>
             <a:pPr lvl="0"/>
             <a:r>
-              <a:rPr lang="en-US" smtClean="0"/>
+              <a:rPr lang="en-US"/>
               <a:t>Click to edit Master text styles</a:t>
             </a:r>
           </a:p>
           <a:p>
             <a:pPr lvl="1"/>
             <a:r>
-              <a:rPr lang="en-US" smtClean="0"/>
+              <a:rPr lang="en-US"/>
               <a:t>Second level</a:t>
             </a:r>
           </a:p>
           <a:p>
             <a:pPr lvl="2"/>
             <a:r>
-              <a:rPr lang="en-US" smtClean="0"/>
+              <a:rPr lang="en-US"/>
               <a:t>Third level</a:t>
             </a:r>
           </a:p>
           <a:p>
             <a:pPr lvl="3"/>
             <a:r>
-              <a:rPr lang="en-US" smtClean="0"/>
+              <a:rPr lang="en-US"/>
               <a:t>Fourth level</a:t>
             </a:r>
           </a:p>
           <a:p>
             <a:pPr lvl="4"/>
             <a:r>
-              <a:rPr lang="en-US" smtClean="0"/>
+              <a:rPr lang="en-US"/>
               <a:t>Fifth level</a:t>
             </a:r>
-            <a:endParaRPr lang="en-US"/>
           </a:p>
         </p:txBody>
       </p:sp>
@@ -2938,7 +2802,7 @@
           <a:p>
             <a:fld id="{5BCAD085-E8A6-8845-BD4E-CB4CCA059FC4}" type="datetimeFigureOut">
               <a:rPr lang="en-US" smtClean="0"/>
-              <a:t>1/27/13</a:t>
+              <a:t>7/7/26</a:t>
             </a:fld>
             <a:endParaRPr lang="en-US"/>
           </a:p>
@@ -3032,10 +2896,9 @@
           <a:lstStyle/>
           <a:p>
             <a:r>
-              <a:rPr lang="en-US" smtClean="0"/>
+              <a:rPr lang="en-US"/>
               <a:t>Click to edit Master title style</a:t>
             </a:r>
-            <a:endParaRPr lang="en-US"/>
           </a:p>
         </p:txBody>
       </p:sp>
@@ -3056,7 +2919,7 @@
           <a:p>
             <a:fld id="{5BCAD085-E8A6-8845-BD4E-CB4CCA059FC4}" type="datetimeFigureOut">
               <a:rPr lang="en-US" smtClean="0"/>
-              <a:t>1/27/13</a:t>
+              <a:t>7/7/26</a:t>
             </a:fld>
             <a:endParaRPr lang="en-US"/>
           </a:p>
@@ -3151,7 +3014,7 @@
           <a:p>
             <a:fld id="{5BCAD085-E8A6-8845-BD4E-CB4CCA059FC4}" type="datetimeFigureOut">
               <a:rPr lang="en-US" smtClean="0"/>
-              <a:t>1/27/13</a:t>
+              <a:t>7/7/26</a:t>
             </a:fld>
             <a:endParaRPr lang="en-US"/>
           </a:p>
@@ -3254,10 +3117,9 @@
           </a:lstStyle>
           <a:p>
             <a:r>
-              <a:rPr lang="en-US" smtClean="0"/>
+              <a:rPr lang="en-US"/>
               <a:t>Click to edit Master title style</a:t>
             </a:r>
-            <a:endParaRPr lang="en-US"/>
           </a:p>
         </p:txBody>
       </p:sp>
@@ -3311,38 +3173,37 @@
           <a:p>
             <a:pPr lvl="0"/>
             <a:r>
-              <a:rPr lang="en-US" smtClean="0"/>
+              <a:rPr lang="en-US"/>
               <a:t>Click to edit Master text styles</a:t>
             </a:r>
           </a:p>
           <a:p>
             <a:pPr lvl="1"/>
             <a:r>
-              <a:rPr lang="en-US" smtClean="0"/>
+              <a:rPr lang="en-US"/>
               <a:t>Second level</a:t>
             </a:r>
           </a:p>
           <a:p>
             <a:pPr lvl="2"/>
             <a:r>
-              <a:rPr lang="en-US" smtClean="0"/>
+              <a:rPr lang="en-US"/>
               <a:t>Third level</a:t>
             </a:r>
           </a:p>
           <a:p>
             <a:pPr lvl="3"/>
             <a:r>
-              <a:rPr lang="en-US" smtClean="0"/>
+              <a:rPr lang="en-US"/>
               <a:t>Fourth level</a:t>
             </a:r>
           </a:p>
           <a:p>
             <a:pPr lvl="4"/>
             <a:r>
-              <a:rPr lang="en-US" smtClean="0"/>
+              <a:rPr lang="en-US"/>
               <a:t>Fifth level</a:t>
             </a:r>
-            <a:endParaRPr lang="en-US"/>
           </a:p>
         </p:txBody>
       </p:sp>
@@ -3405,7 +3266,7 @@
           <a:p>
             <a:pPr lvl="0"/>
             <a:r>
-              <a:rPr lang="en-US" smtClean="0"/>
+              <a:rPr lang="en-US"/>
               <a:t>Click to edit Master text styles</a:t>
             </a:r>
           </a:p>
@@ -3428,7 +3289,7 @@
           <a:p>
             <a:fld id="{5BCAD085-E8A6-8845-BD4E-CB4CCA059FC4}" type="datetimeFigureOut">
               <a:rPr lang="en-US" smtClean="0"/>
-              <a:t>1/27/13</a:t>
+              <a:t>7/7/26</a:t>
             </a:fld>
             <a:endParaRPr lang="en-US"/>
           </a:p>
@@ -3531,10 +3392,9 @@
           </a:lstStyle>
           <a:p>
             <a:r>
-              <a:rPr lang="en-US" smtClean="0"/>
+              <a:rPr lang="en-US"/>
               <a:t>Click to edit Master title style</a:t>
             </a:r>
-            <a:endParaRPr lang="en-US"/>
           </a:p>
         </p:txBody>
       </p:sp>
@@ -3658,7 +3518,7 @@
           <a:p>
             <a:pPr lvl="0"/>
             <a:r>
-              <a:rPr lang="en-US" smtClean="0"/>
+              <a:rPr lang="en-US"/>
               <a:t>Click to edit Master text styles</a:t>
             </a:r>
           </a:p>
@@ -3681,7 +3541,7 @@
           <a:p>
             <a:fld id="{5BCAD085-E8A6-8845-BD4E-CB4CCA059FC4}" type="datetimeFigureOut">
               <a:rPr lang="en-US" smtClean="0"/>
-              <a:t>1/27/13</a:t>
+              <a:t>7/7/26</a:t>
             </a:fld>
             <a:endParaRPr lang="en-US"/>
           </a:p>
@@ -3790,10 +3650,9 @@
           <a:lstStyle/>
           <a:p>
             <a:r>
-              <a:rPr lang="en-US" smtClean="0"/>
+              <a:rPr lang="en-US"/>
               <a:t>Click to edit Master title style</a:t>
             </a:r>
-            <a:endParaRPr lang="en-US"/>
           </a:p>
         </p:txBody>
       </p:sp>
@@ -3824,38 +3683,37 @@
           <a:p>
             <a:pPr lvl="0"/>
             <a:r>
-              <a:rPr lang="en-US" smtClean="0"/>
+              <a:rPr lang="en-US"/>
               <a:t>Click to edit Master text styles</a:t>
             </a:r>
           </a:p>
           <a:p>
             <a:pPr lvl="1"/>
             <a:r>
-              <a:rPr lang="en-US" smtClean="0"/>
+              <a:rPr lang="en-US"/>
               <a:t>Second level</a:t>
             </a:r>
           </a:p>
           <a:p>
             <a:pPr lvl="2"/>
             <a:r>
-              <a:rPr lang="en-US" smtClean="0"/>
+              <a:rPr lang="en-US"/>
               <a:t>Third level</a:t>
             </a:r>
           </a:p>
           <a:p>
             <a:pPr lvl="3"/>
             <a:r>
-              <a:rPr lang="en-US" smtClean="0"/>
+              <a:rPr lang="en-US"/>
               <a:t>Fourth level</a:t>
             </a:r>
           </a:p>
           <a:p>
             <a:pPr lvl="4"/>
             <a:r>
-              <a:rPr lang="en-US" smtClean="0"/>
+              <a:rPr lang="en-US"/>
               <a:t>Fifth level</a:t>
             </a:r>
-            <a:endParaRPr lang="en-US"/>
           </a:p>
         </p:txBody>
       </p:sp>
@@ -3894,7 +3752,7 @@
           <a:p>
             <a:fld id="{5BCAD085-E8A6-8845-BD4E-CB4CCA059FC4}" type="datetimeFigureOut">
               <a:rPr lang="en-US" smtClean="0"/>
-              <a:t>1/27/13</a:t>
+              <a:t>7/7/26</a:t>
             </a:fld>
             <a:endParaRPr lang="en-US"/>
           </a:p>
@@ -4253,7 +4111,7 @@
 </file>
 
 <file path=ppt/slides/slide1.xml><?xml version="1.0" encoding="utf-8"?>
-<p:sld xmlns:a="http://schemas.openxmlformats.org/drawingml/2006/main" xmlns:p="http://schemas.openxmlformats.org/presentationml/2006/main" xmlns:r="http://schemas.openxmlformats.org/officeDocument/2006/relationships">
+<p:sld xmlns:a="http://schemas.openxmlformats.org/drawingml/2006/main" xmlns:r="http://schemas.openxmlformats.org/officeDocument/2006/relationships" xmlns:p="http://schemas.openxmlformats.org/presentationml/2006/main">
   <p:cSld>
     <p:bg>
       <p:bgPr>
@@ -4269,7 +4127,14 @@
         <p:cNvGrpSpPr/>
         <p:nvPr/>
       </p:nvGrpSpPr>
-      <p:grpSpPr/>
+      <p:grpSpPr>
+        <a:xfrm>
+          <a:off x="0" y="0"/>
+          <a:ext cx="0" cy="0"/>
+          <a:chOff x="0" y="0"/>
+          <a:chExt cx="0" cy="0"/>
+        </a:xfrm>
+      </p:grpSpPr>
       <p:sp>
         <p:nvSpPr>
           <p:cNvPr id="2" name="Rectangle 1"/>
@@ -4310,6 +4175,7 @@
           <a:lstStyle/>
           <a:p>
             <a:pPr algn="ctr"/>
+            <a:endParaRPr/>
           </a:p>
         </p:txBody>
       </p:sp>
@@ -4471,7 +4337,7 @@
 </file>
 
 <file path=ppt/slides/slide10.xml><?xml version="1.0" encoding="utf-8"?>
-<p:sld xmlns:a="http://schemas.openxmlformats.org/drawingml/2006/main" xmlns:p="http://schemas.openxmlformats.org/presentationml/2006/main" xmlns:r="http://schemas.openxmlformats.org/officeDocument/2006/relationships">
+<p:sld xmlns:a="http://schemas.openxmlformats.org/drawingml/2006/main" xmlns:r="http://schemas.openxmlformats.org/officeDocument/2006/relationships" xmlns:p="http://schemas.openxmlformats.org/presentationml/2006/main">
   <p:cSld>
     <p:bg>
       <p:bgPr>
@@ -4487,7 +4353,14 @@
         <p:cNvGrpSpPr/>
         <p:nvPr/>
       </p:nvGrpSpPr>
-      <p:grpSpPr/>
+      <p:grpSpPr>
+        <a:xfrm>
+          <a:off x="0" y="0"/>
+          <a:ext cx="0" cy="0"/>
+          <a:chOff x="0" y="0"/>
+          <a:chExt cx="0" cy="0"/>
+        </a:xfrm>
+      </p:grpSpPr>
       <p:sp>
         <p:nvSpPr>
           <p:cNvPr id="2" name="Rectangle 1"/>
@@ -4528,6 +4401,7 @@
           <a:lstStyle/>
           <a:p>
             <a:pPr algn="ctr"/>
+            <a:endParaRPr/>
           </a:p>
         </p:txBody>
       </p:sp>
@@ -4605,6 +4479,7 @@
           <a:lstStyle/>
           <a:p>
             <a:pPr algn="ctr"/>
+            <a:endParaRPr/>
           </a:p>
         </p:txBody>
       </p:sp>
@@ -4725,14 +4600,11 @@
                 <a:spcPts val="300"/>
               </a:spcBef>
             </a:pPr>
-            <a:r>
-              <a:rPr sz="1050">
-                <a:solidFill>
-                  <a:srgbClr val="444444"/>
-                </a:solidFill>
-              </a:rPr>
-              <a:t/>
-            </a:r>
+            <a:endParaRPr sz="1050">
+              <a:solidFill>
+                <a:srgbClr val="444444"/>
+              </a:solidFill>
+            </a:endParaRPr>
           </a:p>
           <a:p>
             <a:pPr algn="l">
@@ -4800,14 +4672,11 @@
                 <a:spcPts val="300"/>
               </a:spcBef>
             </a:pPr>
-            <a:r>
-              <a:rPr sz="1050">
-                <a:solidFill>
-                  <a:srgbClr val="444444"/>
-                </a:solidFill>
-              </a:rPr>
-              <a:t/>
-            </a:r>
+            <a:endParaRPr sz="1050">
+              <a:solidFill>
+                <a:srgbClr val="444444"/>
+              </a:solidFill>
+            </a:endParaRPr>
           </a:p>
           <a:p>
             <a:pPr algn="l">
@@ -4875,14 +4744,11 @@
                 <a:spcPts val="300"/>
               </a:spcBef>
             </a:pPr>
-            <a:r>
-              <a:rPr sz="1050">
-                <a:solidFill>
-                  <a:srgbClr val="444444"/>
-                </a:solidFill>
-              </a:rPr>
-              <a:t/>
-            </a:r>
+            <a:endParaRPr sz="1050">
+              <a:solidFill>
+                <a:srgbClr val="444444"/>
+              </a:solidFill>
+            </a:endParaRPr>
           </a:p>
           <a:p>
             <a:pPr algn="l">
@@ -4935,14 +4801,11 @@
                 <a:spcPts val="300"/>
               </a:spcBef>
             </a:pPr>
-            <a:r>
-              <a:rPr sz="1050">
-                <a:solidFill>
-                  <a:srgbClr val="444444"/>
-                </a:solidFill>
-              </a:rPr>
-              <a:t/>
-            </a:r>
+            <a:endParaRPr sz="1050">
+              <a:solidFill>
+                <a:srgbClr val="444444"/>
+              </a:solidFill>
+            </a:endParaRPr>
           </a:p>
           <a:p>
             <a:pPr algn="l">
@@ -5059,14 +4922,11 @@
                 <a:spcPts val="300"/>
               </a:spcBef>
             </a:pPr>
-            <a:r>
-              <a:rPr sz="1050">
-                <a:solidFill>
-                  <a:srgbClr val="444444"/>
-                </a:solidFill>
-              </a:rPr>
-              <a:t/>
-            </a:r>
+            <a:endParaRPr sz="1050">
+              <a:solidFill>
+                <a:srgbClr val="444444"/>
+              </a:solidFill>
+            </a:endParaRPr>
           </a:p>
           <a:p>
             <a:pPr algn="l">
@@ -5119,14 +4979,11 @@
                 <a:spcPts val="300"/>
               </a:spcBef>
             </a:pPr>
-            <a:r>
-              <a:rPr sz="1050">
-                <a:solidFill>
-                  <a:srgbClr val="444444"/>
-                </a:solidFill>
-              </a:rPr>
-              <a:t/>
-            </a:r>
+            <a:endParaRPr sz="1050">
+              <a:solidFill>
+                <a:srgbClr val="444444"/>
+              </a:solidFill>
+            </a:endParaRPr>
           </a:p>
           <a:p>
             <a:pPr algn="l">
@@ -5179,14 +5036,11 @@
                 <a:spcPts val="300"/>
               </a:spcBef>
             </a:pPr>
-            <a:r>
-              <a:rPr sz="1050">
-                <a:solidFill>
-                  <a:srgbClr val="444444"/>
-                </a:solidFill>
-              </a:rPr>
-              <a:t/>
-            </a:r>
+            <a:endParaRPr sz="1050">
+              <a:solidFill>
+                <a:srgbClr val="444444"/>
+              </a:solidFill>
+            </a:endParaRPr>
           </a:p>
           <a:p>
             <a:pPr algn="l">
@@ -5239,14 +5093,11 @@
                 <a:spcPts val="300"/>
               </a:spcBef>
             </a:pPr>
-            <a:r>
-              <a:rPr sz="1050">
-                <a:solidFill>
-                  <a:srgbClr val="444444"/>
-                </a:solidFill>
-              </a:rPr>
-              <a:t/>
-            </a:r>
+            <a:endParaRPr sz="1050">
+              <a:solidFill>
+                <a:srgbClr val="444444"/>
+              </a:solidFill>
+            </a:endParaRPr>
           </a:p>
           <a:p>
             <a:pPr algn="l">
@@ -5299,14 +5150,11 @@
                 <a:spcPts val="300"/>
               </a:spcBef>
             </a:pPr>
-            <a:r>
-              <a:rPr sz="1050">
-                <a:solidFill>
-                  <a:srgbClr val="444444"/>
-                </a:solidFill>
-              </a:rPr>
-              <a:t/>
-            </a:r>
+            <a:endParaRPr sz="1050">
+              <a:solidFill>
+                <a:srgbClr val="444444"/>
+              </a:solidFill>
+            </a:endParaRPr>
           </a:p>
           <a:p>
             <a:pPr algn="l">
@@ -5364,7 +5212,7 @@
 </file>
 
 <file path=ppt/slides/slide11.xml><?xml version="1.0" encoding="utf-8"?>
-<p:sld xmlns:a="http://schemas.openxmlformats.org/drawingml/2006/main" xmlns:p="http://schemas.openxmlformats.org/presentationml/2006/main" xmlns:r="http://schemas.openxmlformats.org/officeDocument/2006/relationships">
+<p:sld xmlns:a="http://schemas.openxmlformats.org/drawingml/2006/main" xmlns:r="http://schemas.openxmlformats.org/officeDocument/2006/relationships" xmlns:p="http://schemas.openxmlformats.org/presentationml/2006/main">
   <p:cSld>
     <p:bg>
       <p:bgPr>
@@ -5380,7 +5228,14 @@
         <p:cNvGrpSpPr/>
         <p:nvPr/>
       </p:nvGrpSpPr>
-      <p:grpSpPr/>
+      <p:grpSpPr>
+        <a:xfrm>
+          <a:off x="0" y="0"/>
+          <a:ext cx="0" cy="0"/>
+          <a:chOff x="0" y="0"/>
+          <a:chExt cx="0" cy="0"/>
+        </a:xfrm>
+      </p:grpSpPr>
       <p:sp>
         <p:nvSpPr>
           <p:cNvPr id="2" name="Rectangle 1"/>
@@ -5421,6 +5276,7 @@
           <a:lstStyle/>
           <a:p>
             <a:pPr algn="ctr"/>
+            <a:endParaRPr/>
           </a:p>
         </p:txBody>
       </p:sp>
@@ -5498,6 +5354,7 @@
           <a:lstStyle/>
           <a:p>
             <a:pPr algn="ctr"/>
+            <a:endParaRPr/>
           </a:p>
         </p:txBody>
       </p:sp>
@@ -5633,14 +5490,11 @@
                 <a:spcPts val="300"/>
               </a:spcBef>
             </a:pPr>
-            <a:r>
-              <a:rPr sz="1050">
-                <a:solidFill>
-                  <a:srgbClr val="444444"/>
-                </a:solidFill>
-              </a:rPr>
-              <a:t/>
-            </a:r>
+            <a:endParaRPr sz="1050">
+              <a:solidFill>
+                <a:srgbClr val="444444"/>
+              </a:solidFill>
+            </a:endParaRPr>
           </a:p>
           <a:p>
             <a:pPr algn="l">
@@ -5708,14 +5562,11 @@
                 <a:spcPts val="300"/>
               </a:spcBef>
             </a:pPr>
-            <a:r>
-              <a:rPr sz="1050">
-                <a:solidFill>
-                  <a:srgbClr val="444444"/>
-                </a:solidFill>
-              </a:rPr>
-              <a:t/>
-            </a:r>
+            <a:endParaRPr sz="1050">
+              <a:solidFill>
+                <a:srgbClr val="444444"/>
+              </a:solidFill>
+            </a:endParaRPr>
           </a:p>
           <a:p>
             <a:pPr algn="l">
@@ -5768,14 +5619,11 @@
                 <a:spcPts val="300"/>
               </a:spcBef>
             </a:pPr>
-            <a:r>
-              <a:rPr sz="1050">
-                <a:solidFill>
-                  <a:srgbClr val="444444"/>
-                </a:solidFill>
-              </a:rPr>
-              <a:t/>
-            </a:r>
+            <a:endParaRPr sz="1050">
+              <a:solidFill>
+                <a:srgbClr val="444444"/>
+              </a:solidFill>
+            </a:endParaRPr>
           </a:p>
           <a:p>
             <a:pPr algn="l">
@@ -5843,14 +5691,11 @@
                 <a:spcPts val="300"/>
               </a:spcBef>
             </a:pPr>
-            <a:r>
-              <a:rPr sz="1050">
-                <a:solidFill>
-                  <a:srgbClr val="444444"/>
-                </a:solidFill>
-              </a:rPr>
-              <a:t/>
-            </a:r>
+            <a:endParaRPr sz="1050">
+              <a:solidFill>
+                <a:srgbClr val="444444"/>
+              </a:solidFill>
+            </a:endParaRPr>
           </a:p>
           <a:p>
             <a:pPr algn="l">
@@ -5982,14 +5827,11 @@
                 <a:spcPts val="300"/>
               </a:spcBef>
             </a:pPr>
-            <a:r>
-              <a:rPr sz="1050">
-                <a:solidFill>
-                  <a:srgbClr val="444444"/>
-                </a:solidFill>
-              </a:rPr>
-              <a:t/>
-            </a:r>
+            <a:endParaRPr sz="1050">
+              <a:solidFill>
+                <a:srgbClr val="444444"/>
+              </a:solidFill>
+            </a:endParaRPr>
           </a:p>
           <a:p>
             <a:pPr algn="l">
@@ -6042,14 +5884,11 @@
                 <a:spcPts val="300"/>
               </a:spcBef>
             </a:pPr>
-            <a:r>
-              <a:rPr sz="1050">
-                <a:solidFill>
-                  <a:srgbClr val="444444"/>
-                </a:solidFill>
-              </a:rPr>
-              <a:t/>
-            </a:r>
+            <a:endParaRPr sz="1050">
+              <a:solidFill>
+                <a:srgbClr val="444444"/>
+              </a:solidFill>
+            </a:endParaRPr>
           </a:p>
           <a:p>
             <a:pPr algn="l">
@@ -6123,6 +5962,7 @@
           <a:lstStyle/>
           <a:p>
             <a:pPr algn="ctr"/>
+            <a:endParaRPr/>
           </a:p>
         </p:txBody>
       </p:sp>
@@ -6211,7 +6051,7 @@
 </file>
 
 <file path=ppt/slides/slide2.xml><?xml version="1.0" encoding="utf-8"?>
-<p:sld xmlns:a="http://schemas.openxmlformats.org/drawingml/2006/main" xmlns:p="http://schemas.openxmlformats.org/presentationml/2006/main" xmlns:r="http://schemas.openxmlformats.org/officeDocument/2006/relationships">
+<p:sld xmlns:a="http://schemas.openxmlformats.org/drawingml/2006/main" xmlns:r="http://schemas.openxmlformats.org/officeDocument/2006/relationships" xmlns:p="http://schemas.openxmlformats.org/presentationml/2006/main">
   <p:cSld>
     <p:bg>
       <p:bgPr>
@@ -6227,7 +6067,14 @@
         <p:cNvGrpSpPr/>
         <p:nvPr/>
       </p:nvGrpSpPr>
-      <p:grpSpPr/>
+      <p:grpSpPr>
+        <a:xfrm>
+          <a:off x="0" y="0"/>
+          <a:ext cx="0" cy="0"/>
+          <a:chOff x="0" y="0"/>
+          <a:chExt cx="0" cy="0"/>
+        </a:xfrm>
+      </p:grpSpPr>
       <p:sp>
         <p:nvSpPr>
           <p:cNvPr id="2" name="Rectangle 1"/>
@@ -6268,6 +6115,7 @@
           <a:lstStyle/>
           <a:p>
             <a:pPr algn="ctr"/>
+            <a:endParaRPr/>
           </a:p>
         </p:txBody>
       </p:sp>
@@ -6345,6 +6193,7 @@
           <a:lstStyle/>
           <a:p>
             <a:pPr algn="ctr"/>
+            <a:endParaRPr/>
           </a:p>
         </p:txBody>
       </p:sp>
@@ -6495,14 +6344,11 @@
                 <a:spcPts val="300"/>
               </a:spcBef>
             </a:pPr>
-            <a:r>
-              <a:rPr sz="1050">
-                <a:solidFill>
-                  <a:srgbClr val="444444"/>
-                </a:solidFill>
-              </a:rPr>
-              <a:t/>
-            </a:r>
+            <a:endParaRPr sz="1050">
+              <a:solidFill>
+                <a:srgbClr val="444444"/>
+              </a:solidFill>
+            </a:endParaRPr>
           </a:p>
           <a:p>
             <a:pPr algn="l">
@@ -6570,14 +6416,11 @@
                 <a:spcPts val="300"/>
               </a:spcBef>
             </a:pPr>
-            <a:r>
-              <a:rPr sz="1050">
-                <a:solidFill>
-                  <a:srgbClr val="444444"/>
-                </a:solidFill>
-              </a:rPr>
-              <a:t/>
-            </a:r>
+            <a:endParaRPr sz="1050">
+              <a:solidFill>
+                <a:srgbClr val="444444"/>
+              </a:solidFill>
+            </a:endParaRPr>
           </a:p>
           <a:p>
             <a:pPr algn="l">
@@ -6739,14 +6582,11 @@
                 <a:spcPts val="300"/>
               </a:spcBef>
             </a:pPr>
-            <a:r>
-              <a:rPr sz="1050">
-                <a:solidFill>
-                  <a:srgbClr val="444444"/>
-                </a:solidFill>
-              </a:rPr>
-              <a:t/>
-            </a:r>
+            <a:endParaRPr sz="1050">
+              <a:solidFill>
+                <a:srgbClr val="444444"/>
+              </a:solidFill>
+            </a:endParaRPr>
           </a:p>
           <a:p>
             <a:pPr algn="l">
@@ -6829,14 +6669,11 @@
                 <a:spcPts val="300"/>
               </a:spcBef>
             </a:pPr>
-            <a:r>
-              <a:rPr sz="1050">
-                <a:solidFill>
-                  <a:srgbClr val="444444"/>
-                </a:solidFill>
-              </a:rPr>
-              <a:t/>
-            </a:r>
+            <a:endParaRPr sz="1050">
+              <a:solidFill>
+                <a:srgbClr val="444444"/>
+              </a:solidFill>
+            </a:endParaRPr>
           </a:p>
           <a:p>
             <a:pPr algn="l">
@@ -6904,14 +6741,11 @@
                 <a:spcPts val="300"/>
               </a:spcBef>
             </a:pPr>
-            <a:r>
-              <a:rPr sz="1050">
-                <a:solidFill>
-                  <a:srgbClr val="444444"/>
-                </a:solidFill>
-              </a:rPr>
-              <a:t/>
-            </a:r>
+            <a:endParaRPr sz="1050">
+              <a:solidFill>
+                <a:srgbClr val="444444"/>
+              </a:solidFill>
+            </a:endParaRPr>
           </a:p>
           <a:p>
             <a:pPr algn="l">
@@ -6954,7 +6788,7 @@
 </file>
 
 <file path=ppt/slides/slide3.xml><?xml version="1.0" encoding="utf-8"?>
-<p:sld xmlns:a="http://schemas.openxmlformats.org/drawingml/2006/main" xmlns:p="http://schemas.openxmlformats.org/presentationml/2006/main" xmlns:r="http://schemas.openxmlformats.org/officeDocument/2006/relationships">
+<p:sld xmlns:a="http://schemas.openxmlformats.org/drawingml/2006/main" xmlns:r="http://schemas.openxmlformats.org/officeDocument/2006/relationships" xmlns:p="http://schemas.openxmlformats.org/presentationml/2006/main">
   <p:cSld>
     <p:bg>
       <p:bgPr>
@@ -6970,7 +6804,14 @@
         <p:cNvGrpSpPr/>
         <p:nvPr/>
       </p:nvGrpSpPr>
-      <p:grpSpPr/>
+      <p:grpSpPr>
+        <a:xfrm>
+          <a:off x="0" y="0"/>
+          <a:ext cx="0" cy="0"/>
+          <a:chOff x="0" y="0"/>
+          <a:chExt cx="0" cy="0"/>
+        </a:xfrm>
+      </p:grpSpPr>
       <p:sp>
         <p:nvSpPr>
           <p:cNvPr id="2" name="Rectangle 1"/>
@@ -7011,6 +6852,7 @@
           <a:lstStyle/>
           <a:p>
             <a:pPr algn="ctr"/>
+            <a:endParaRPr/>
           </a:p>
         </p:txBody>
       </p:sp>
@@ -7088,6 +6930,7 @@
           <a:lstStyle/>
           <a:p>
             <a:pPr algn="ctr"/>
+            <a:endParaRPr/>
           </a:p>
         </p:txBody>
       </p:sp>
@@ -7223,14 +7066,11 @@
                 <a:spcPts val="300"/>
               </a:spcBef>
             </a:pPr>
-            <a:r>
-              <a:rPr sz="1050">
-                <a:solidFill>
-                  <a:srgbClr val="444444"/>
-                </a:solidFill>
-              </a:rPr>
-              <a:t/>
-            </a:r>
+            <a:endParaRPr sz="1050">
+              <a:solidFill>
+                <a:srgbClr val="444444"/>
+              </a:solidFill>
+            </a:endParaRPr>
           </a:p>
           <a:p>
             <a:pPr algn="l">
@@ -7253,14 +7093,11 @@
                 <a:spcPts val="300"/>
               </a:spcBef>
             </a:pPr>
-            <a:r>
-              <a:rPr sz="1050">
-                <a:solidFill>
-                  <a:srgbClr val="444444"/>
-                </a:solidFill>
-              </a:rPr>
-              <a:t/>
-            </a:r>
+            <a:endParaRPr sz="1050">
+              <a:solidFill>
+                <a:srgbClr val="444444"/>
+              </a:solidFill>
+            </a:endParaRPr>
           </a:p>
           <a:p>
             <a:pPr algn="l">
@@ -7328,14 +7165,11 @@
                 <a:spcPts val="300"/>
               </a:spcBef>
             </a:pPr>
-            <a:r>
-              <a:rPr sz="1050">
-                <a:solidFill>
-                  <a:srgbClr val="444444"/>
-                </a:solidFill>
-              </a:rPr>
-              <a:t/>
-            </a:r>
+            <a:endParaRPr sz="1050">
+              <a:solidFill>
+                <a:srgbClr val="444444"/>
+              </a:solidFill>
+            </a:endParaRPr>
           </a:p>
           <a:p>
             <a:pPr algn="l">
@@ -7452,14 +7286,11 @@
                 <a:spcPts val="300"/>
               </a:spcBef>
             </a:pPr>
-            <a:r>
-              <a:rPr sz="1050">
-                <a:solidFill>
-                  <a:srgbClr val="444444"/>
-                </a:solidFill>
-              </a:rPr>
-              <a:t/>
-            </a:r>
+            <a:endParaRPr sz="1050">
+              <a:solidFill>
+                <a:srgbClr val="444444"/>
+              </a:solidFill>
+            </a:endParaRPr>
           </a:p>
           <a:p>
             <a:pPr algn="l">
@@ -7527,14 +7358,11 @@
                 <a:spcPts val="300"/>
               </a:spcBef>
             </a:pPr>
-            <a:r>
-              <a:rPr sz="1050">
-                <a:solidFill>
-                  <a:srgbClr val="444444"/>
-                </a:solidFill>
-              </a:rPr>
-              <a:t/>
-            </a:r>
+            <a:endParaRPr sz="1050">
+              <a:solidFill>
+                <a:srgbClr val="444444"/>
+              </a:solidFill>
+            </a:endParaRPr>
           </a:p>
           <a:p>
             <a:pPr algn="l">
@@ -7557,14 +7385,11 @@
                 <a:spcPts val="300"/>
               </a:spcBef>
             </a:pPr>
-            <a:r>
-              <a:rPr sz="1050">
-                <a:solidFill>
-                  <a:srgbClr val="444444"/>
-                </a:solidFill>
-              </a:rPr>
-              <a:t/>
-            </a:r>
+            <a:endParaRPr sz="1050">
+              <a:solidFill>
+                <a:srgbClr val="444444"/>
+              </a:solidFill>
+            </a:endParaRPr>
           </a:p>
           <a:p>
             <a:pPr algn="l">
@@ -7617,14 +7442,11 @@
                 <a:spcPts val="300"/>
               </a:spcBef>
             </a:pPr>
-            <a:r>
-              <a:rPr sz="1050">
-                <a:solidFill>
-                  <a:srgbClr val="444444"/>
-                </a:solidFill>
-              </a:rPr>
-              <a:t/>
-            </a:r>
+            <a:endParaRPr sz="1050">
+              <a:solidFill>
+                <a:srgbClr val="444444"/>
+              </a:solidFill>
+            </a:endParaRPr>
           </a:p>
           <a:p>
             <a:pPr algn="l">
@@ -7662,14 +7484,11 @@
                 <a:spcPts val="300"/>
               </a:spcBef>
             </a:pPr>
-            <a:r>
-              <a:rPr sz="1050">
-                <a:solidFill>
-                  <a:srgbClr val="444444"/>
-                </a:solidFill>
-              </a:rPr>
-              <a:t/>
-            </a:r>
+            <a:endParaRPr sz="1050">
+              <a:solidFill>
+                <a:srgbClr val="444444"/>
+              </a:solidFill>
+            </a:endParaRPr>
           </a:p>
           <a:p>
             <a:pPr algn="l">
@@ -7692,14 +7511,11 @@
                 <a:spcPts val="300"/>
               </a:spcBef>
             </a:pPr>
-            <a:r>
-              <a:rPr sz="1050">
-                <a:solidFill>
-                  <a:srgbClr val="444444"/>
-                </a:solidFill>
-              </a:rPr>
-              <a:t/>
-            </a:r>
+            <a:endParaRPr sz="1050">
+              <a:solidFill>
+                <a:srgbClr val="444444"/>
+              </a:solidFill>
+            </a:endParaRPr>
           </a:p>
           <a:p>
             <a:pPr algn="l">
@@ -7727,7 +7543,7 @@
 </file>
 
 <file path=ppt/slides/slide4.xml><?xml version="1.0" encoding="utf-8"?>
-<p:sld xmlns:a="http://schemas.openxmlformats.org/drawingml/2006/main" xmlns:p="http://schemas.openxmlformats.org/presentationml/2006/main" xmlns:r="http://schemas.openxmlformats.org/officeDocument/2006/relationships">
+<p:sld xmlns:a="http://schemas.openxmlformats.org/drawingml/2006/main" xmlns:r="http://schemas.openxmlformats.org/officeDocument/2006/relationships" xmlns:p="http://schemas.openxmlformats.org/presentationml/2006/main">
   <p:cSld>
     <p:bg>
       <p:bgPr>
@@ -7743,7 +7559,14 @@
         <p:cNvGrpSpPr/>
         <p:nvPr/>
       </p:nvGrpSpPr>
-      <p:grpSpPr/>
+      <p:grpSpPr>
+        <a:xfrm>
+          <a:off x="0" y="0"/>
+          <a:ext cx="0" cy="0"/>
+          <a:chOff x="0" y="0"/>
+          <a:chExt cx="0" cy="0"/>
+        </a:xfrm>
+      </p:grpSpPr>
       <p:sp>
         <p:nvSpPr>
           <p:cNvPr id="2" name="Rectangle 1"/>
@@ -7784,6 +7607,7 @@
           <a:lstStyle/>
           <a:p>
             <a:pPr algn="ctr"/>
+            <a:endParaRPr/>
           </a:p>
         </p:txBody>
       </p:sp>
@@ -7861,6 +7685,7 @@
           <a:lstStyle/>
           <a:p>
             <a:pPr algn="ctr"/>
+            <a:endParaRPr/>
           </a:p>
         </p:txBody>
       </p:sp>
@@ -7898,9 +7723,33 @@
           </a:p>
         </p:txBody>
       </p:sp>
-      <p:sp>
-        <p:nvSpPr>
-          <p:cNvPr id="6" name="TextBox 5"/>
+      <p:pic>
+        <p:nvPicPr>
+          <p:cNvPr id="6" name="Picture 5" descr="readmission_eda.png"/>
+          <p:cNvPicPr>
+            <a:picLocks noChangeAspect="1"/>
+          </p:cNvPicPr>
+          <p:nvPr/>
+        </p:nvPicPr>
+        <p:blipFill>
+          <a:blip r:embed="rId3"/>
+          <a:stretch>
+            <a:fillRect/>
+          </a:stretch>
+        </p:blipFill>
+        <p:spPr>
+          <a:xfrm>
+            <a:off x="228600" y="868680"/>
+            <a:ext cx="7040880" cy="2194733"/>
+          </a:xfrm>
+          <a:prstGeom prst="rect">
+            <a:avLst/>
+          </a:prstGeom>
+        </p:spPr>
+      </p:pic>
+      <p:sp>
+        <p:nvSpPr>
+          <p:cNvPr id="7" name="TextBox 6"/>
           <p:cNvSpPr txBox="1"/>
           <p:nvPr/>
         </p:nvSpPr>
@@ -8039,7 +7888,7 @@
       </p:sp>
       <p:sp>
         <p:nvSpPr>
-          <p:cNvPr id="7" name="Rectangle 6"/>
+          <p:cNvPr id="8" name="Rectangle 7"/>
           <p:cNvSpPr/>
           <p:nvPr/>
         </p:nvSpPr>
@@ -8077,12 +7926,13 @@
           <a:lstStyle/>
           <a:p>
             <a:pPr algn="ctr"/>
-          </a:p>
-        </p:txBody>
-      </p:sp>
-      <p:sp>
-        <p:nvSpPr>
-          <p:cNvPr id="8" name="TextBox 7"/>
+            <a:endParaRPr/>
+          </a:p>
+        </p:txBody>
+      </p:sp>
+      <p:sp>
+        <p:nvSpPr>
+          <p:cNvPr id="9" name="TextBox 8"/>
           <p:cNvSpPr txBox="1"/>
           <p:nvPr/>
         </p:nvSpPr>
@@ -8116,7 +7966,7 @@
       </p:sp>
       <p:sp>
         <p:nvSpPr>
-          <p:cNvPr id="9" name="TextBox 8"/>
+          <p:cNvPr id="10" name="TextBox 9"/>
           <p:cNvSpPr txBox="1"/>
           <p:nvPr/>
         </p:nvSpPr>
@@ -8151,7 +8001,7 @@
       </p:sp>
       <p:sp>
         <p:nvSpPr>
-          <p:cNvPr id="10" name="TextBox 9"/>
+          <p:cNvPr id="11" name="TextBox 10"/>
           <p:cNvSpPr txBox="1"/>
           <p:nvPr/>
         </p:nvSpPr>
@@ -8252,7 +8102,7 @@
 </file>
 
 <file path=ppt/slides/slide5.xml><?xml version="1.0" encoding="utf-8"?>
-<p:sld xmlns:a="http://schemas.openxmlformats.org/drawingml/2006/main" xmlns:p="http://schemas.openxmlformats.org/presentationml/2006/main" xmlns:r="http://schemas.openxmlformats.org/officeDocument/2006/relationships">
+<p:sld xmlns:a="http://schemas.openxmlformats.org/drawingml/2006/main" xmlns:r="http://schemas.openxmlformats.org/officeDocument/2006/relationships" xmlns:p="http://schemas.openxmlformats.org/presentationml/2006/main">
   <p:cSld>
     <p:bg>
       <p:bgPr>
@@ -8268,7 +8118,14 @@
         <p:cNvGrpSpPr/>
         <p:nvPr/>
       </p:nvGrpSpPr>
-      <p:grpSpPr/>
+      <p:grpSpPr>
+        <a:xfrm>
+          <a:off x="0" y="0"/>
+          <a:ext cx="0" cy="0"/>
+          <a:chOff x="0" y="0"/>
+          <a:chExt cx="0" cy="0"/>
+        </a:xfrm>
+      </p:grpSpPr>
       <p:sp>
         <p:nvSpPr>
           <p:cNvPr id="2" name="Rectangle 1"/>
@@ -8309,6 +8166,7 @@
           <a:lstStyle/>
           <a:p>
             <a:pPr algn="ctr"/>
+            <a:endParaRPr/>
           </a:p>
         </p:txBody>
       </p:sp>
@@ -8386,6 +8244,7 @@
           <a:lstStyle/>
           <a:p>
             <a:pPr algn="ctr"/>
+            <a:endParaRPr/>
           </a:p>
         </p:txBody>
       </p:sp>
@@ -8476,14 +8335,11 @@
                 <a:spcPts val="300"/>
               </a:spcBef>
             </a:pPr>
-            <a:r>
-              <a:rPr sz="1050">
-                <a:solidFill>
-                  <a:srgbClr val="444444"/>
-                </a:solidFill>
-              </a:rPr>
-              <a:t/>
-            </a:r>
+            <a:endParaRPr sz="1050">
+              <a:solidFill>
+                <a:srgbClr val="444444"/>
+              </a:solidFill>
+            </a:endParaRPr>
           </a:p>
           <a:p>
             <a:pPr algn="l">
@@ -8521,14 +8377,11 @@
                 <a:spcPts val="300"/>
               </a:spcBef>
             </a:pPr>
-            <a:r>
-              <a:rPr sz="1050">
-                <a:solidFill>
-                  <a:srgbClr val="444444"/>
-                </a:solidFill>
-              </a:rPr>
-              <a:t/>
-            </a:r>
+            <a:endParaRPr sz="1050">
+              <a:solidFill>
+                <a:srgbClr val="444444"/>
+              </a:solidFill>
+            </a:endParaRPr>
           </a:p>
           <a:p>
             <a:pPr algn="l">
@@ -8551,14 +8404,11 @@
                 <a:spcPts val="300"/>
               </a:spcBef>
             </a:pPr>
-            <a:r>
-              <a:rPr sz="1050">
-                <a:solidFill>
-                  <a:srgbClr val="444444"/>
-                </a:solidFill>
-              </a:rPr>
-              <a:t/>
-            </a:r>
+            <a:endParaRPr sz="1050">
+              <a:solidFill>
+                <a:srgbClr val="444444"/>
+              </a:solidFill>
+            </a:endParaRPr>
           </a:p>
           <a:p>
             <a:pPr algn="l">
@@ -8596,14 +8446,11 @@
                 <a:spcPts val="300"/>
               </a:spcBef>
             </a:pPr>
-            <a:r>
-              <a:rPr sz="1050">
-                <a:solidFill>
-                  <a:srgbClr val="444444"/>
-                </a:solidFill>
-              </a:rPr>
-              <a:t/>
-            </a:r>
+            <a:endParaRPr sz="1050">
+              <a:solidFill>
+                <a:srgbClr val="444444"/>
+              </a:solidFill>
+            </a:endParaRPr>
           </a:p>
           <a:p>
             <a:pPr algn="l">
@@ -8641,14 +8488,11 @@
                 <a:spcPts val="300"/>
               </a:spcBef>
             </a:pPr>
-            <a:r>
-              <a:rPr sz="1050">
-                <a:solidFill>
-                  <a:srgbClr val="444444"/>
-                </a:solidFill>
-              </a:rPr>
-              <a:t/>
-            </a:r>
+            <a:endParaRPr sz="1050">
+              <a:solidFill>
+                <a:srgbClr val="444444"/>
+              </a:solidFill>
+            </a:endParaRPr>
           </a:p>
           <a:p>
             <a:pPr algn="l">
@@ -8686,14 +8530,11 @@
                 <a:spcPts val="300"/>
               </a:spcBef>
             </a:pPr>
-            <a:r>
-              <a:rPr sz="1050">
-                <a:solidFill>
-                  <a:srgbClr val="444444"/>
-                </a:solidFill>
-              </a:rPr>
-              <a:t/>
-            </a:r>
+            <a:endParaRPr sz="1050">
+              <a:solidFill>
+                <a:srgbClr val="444444"/>
+              </a:solidFill>
+            </a:endParaRPr>
           </a:p>
           <a:p>
             <a:pPr algn="l">
@@ -8825,14 +8666,11 @@
                 <a:spcPts val="300"/>
               </a:spcBef>
             </a:pPr>
-            <a:r>
-              <a:rPr sz="1050">
-                <a:solidFill>
-                  <a:srgbClr val="444444"/>
-                </a:solidFill>
-              </a:rPr>
-              <a:t/>
-            </a:r>
+            <a:endParaRPr sz="1050">
+              <a:solidFill>
+                <a:srgbClr val="444444"/>
+              </a:solidFill>
+            </a:endParaRPr>
           </a:p>
           <a:p>
             <a:pPr algn="l">
@@ -8870,14 +8708,11 @@
                 <a:spcPts val="300"/>
               </a:spcBef>
             </a:pPr>
-            <a:r>
-              <a:rPr sz="1050">
-                <a:solidFill>
-                  <a:srgbClr val="444444"/>
-                </a:solidFill>
-              </a:rPr>
-              <a:t/>
-            </a:r>
+            <a:endParaRPr sz="1050">
+              <a:solidFill>
+                <a:srgbClr val="444444"/>
+              </a:solidFill>
+            </a:endParaRPr>
           </a:p>
           <a:p>
             <a:pPr algn="l">
@@ -8981,6 +8816,7 @@
           <a:lstStyle/>
           <a:p>
             <a:pPr algn="ctr"/>
+            <a:endParaRPr/>
           </a:p>
         </p:txBody>
       </p:sp>
@@ -9061,7 +8897,7 @@
 </file>
 
 <file path=ppt/slides/slide6.xml><?xml version="1.0" encoding="utf-8"?>
-<p:sld xmlns:a="http://schemas.openxmlformats.org/drawingml/2006/main" xmlns:p="http://schemas.openxmlformats.org/presentationml/2006/main" xmlns:r="http://schemas.openxmlformats.org/officeDocument/2006/relationships">
+<p:sld xmlns:a="http://schemas.openxmlformats.org/drawingml/2006/main" xmlns:r="http://schemas.openxmlformats.org/officeDocument/2006/relationships" xmlns:p="http://schemas.openxmlformats.org/presentationml/2006/main">
   <p:cSld>
     <p:bg>
       <p:bgPr>
@@ -9077,7 +8913,14 @@
         <p:cNvGrpSpPr/>
         <p:nvPr/>
       </p:nvGrpSpPr>
-      <p:grpSpPr/>
+      <p:grpSpPr>
+        <a:xfrm>
+          <a:off x="0" y="0"/>
+          <a:ext cx="0" cy="0"/>
+          <a:chOff x="0" y="0"/>
+          <a:chExt cx="0" cy="0"/>
+        </a:xfrm>
+      </p:grpSpPr>
       <p:sp>
         <p:nvSpPr>
           <p:cNvPr id="2" name="Rectangle 1"/>
@@ -9118,6 +8961,7 @@
           <a:lstStyle/>
           <a:p>
             <a:pPr algn="ctr"/>
+            <a:endParaRPr/>
           </a:p>
         </p:txBody>
       </p:sp>
@@ -9195,6 +9039,7 @@
           <a:lstStyle/>
           <a:p>
             <a:pPr algn="ctr"/>
+            <a:endParaRPr/>
           </a:p>
         </p:txBody>
       </p:sp>
@@ -9300,14 +9145,11 @@
                 <a:spcPts val="300"/>
               </a:spcBef>
             </a:pPr>
-            <a:r>
-              <a:rPr sz="1050">
-                <a:solidFill>
-                  <a:srgbClr val="444444"/>
-                </a:solidFill>
-              </a:rPr>
-              <a:t/>
-            </a:r>
+            <a:endParaRPr sz="1050">
+              <a:solidFill>
+                <a:srgbClr val="444444"/>
+              </a:solidFill>
+            </a:endParaRPr>
           </a:p>
           <a:p>
             <a:pPr algn="l">
@@ -9375,14 +9217,11 @@
                 <a:spcPts val="300"/>
               </a:spcBef>
             </a:pPr>
-            <a:r>
-              <a:rPr sz="1050">
-                <a:solidFill>
-                  <a:srgbClr val="444444"/>
-                </a:solidFill>
-              </a:rPr>
-              <a:t/>
-            </a:r>
+            <a:endParaRPr sz="1050">
+              <a:solidFill>
+                <a:srgbClr val="444444"/>
+              </a:solidFill>
+            </a:endParaRPr>
           </a:p>
           <a:p>
             <a:pPr algn="l">
@@ -9405,14 +9244,11 @@
                 <a:spcPts val="300"/>
               </a:spcBef>
             </a:pPr>
-            <a:r>
-              <a:rPr sz="1050">
-                <a:solidFill>
-                  <a:srgbClr val="444444"/>
-                </a:solidFill>
-              </a:rPr>
-              <a:t/>
-            </a:r>
+            <a:endParaRPr sz="1050">
+              <a:solidFill>
+                <a:srgbClr val="444444"/>
+              </a:solidFill>
+            </a:endParaRPr>
           </a:p>
           <a:p>
             <a:pPr algn="l">
@@ -9465,14 +9301,11 @@
                 <a:spcPts val="300"/>
               </a:spcBef>
             </a:pPr>
-            <a:r>
-              <a:rPr sz="1050">
-                <a:solidFill>
-                  <a:srgbClr val="444444"/>
-                </a:solidFill>
-              </a:rPr>
-              <a:t/>
-            </a:r>
+            <a:endParaRPr sz="1050">
+              <a:solidFill>
+                <a:srgbClr val="444444"/>
+              </a:solidFill>
+            </a:endParaRPr>
           </a:p>
           <a:p>
             <a:pPr algn="l">
@@ -9510,14 +9343,11 @@
                 <a:spcPts val="300"/>
               </a:spcBef>
             </a:pPr>
-            <a:r>
-              <a:rPr sz="1050">
-                <a:solidFill>
-                  <a:srgbClr val="444444"/>
-                </a:solidFill>
-              </a:rPr>
-              <a:t/>
-            </a:r>
+            <a:endParaRPr sz="1050">
+              <a:solidFill>
+                <a:srgbClr val="444444"/>
+              </a:solidFill>
+            </a:endParaRPr>
           </a:p>
           <a:p>
             <a:pPr algn="l">
@@ -9634,14 +9464,11 @@
                 <a:spcPts val="300"/>
               </a:spcBef>
             </a:pPr>
-            <a:r>
-              <a:rPr sz="1050">
-                <a:solidFill>
-                  <a:srgbClr val="444444"/>
-                </a:solidFill>
-              </a:rPr>
-              <a:t/>
-            </a:r>
+            <a:endParaRPr sz="1050">
+              <a:solidFill>
+                <a:srgbClr val="444444"/>
+              </a:solidFill>
+            </a:endParaRPr>
           </a:p>
           <a:p>
             <a:pPr algn="l">
@@ -9724,14 +9551,11 @@
                 <a:spcPts val="300"/>
               </a:spcBef>
             </a:pPr>
-            <a:r>
-              <a:rPr sz="1050">
-                <a:solidFill>
-                  <a:srgbClr val="444444"/>
-                </a:solidFill>
-              </a:rPr>
-              <a:t/>
-            </a:r>
+            <a:endParaRPr sz="1050">
+              <a:solidFill>
+                <a:srgbClr val="444444"/>
+              </a:solidFill>
+            </a:endParaRPr>
           </a:p>
           <a:p>
             <a:pPr algn="l">
@@ -9879,7 +9703,7 @@
 </file>
 
 <file path=ppt/slides/slide7.xml><?xml version="1.0" encoding="utf-8"?>
-<p:sld xmlns:a="http://schemas.openxmlformats.org/drawingml/2006/main" xmlns:p="http://schemas.openxmlformats.org/presentationml/2006/main" xmlns:r="http://schemas.openxmlformats.org/officeDocument/2006/relationships">
+<p:sld xmlns:a="http://schemas.openxmlformats.org/drawingml/2006/main" xmlns:r="http://schemas.openxmlformats.org/officeDocument/2006/relationships" xmlns:p="http://schemas.openxmlformats.org/presentationml/2006/main">
   <p:cSld>
     <p:bg>
       <p:bgPr>
@@ -9895,7 +9719,14 @@
         <p:cNvGrpSpPr/>
         <p:nvPr/>
       </p:nvGrpSpPr>
-      <p:grpSpPr/>
+      <p:grpSpPr>
+        <a:xfrm>
+          <a:off x="0" y="0"/>
+          <a:ext cx="0" cy="0"/>
+          <a:chOff x="0" y="0"/>
+          <a:chExt cx="0" cy="0"/>
+        </a:xfrm>
+      </p:grpSpPr>
       <p:sp>
         <p:nvSpPr>
           <p:cNvPr id="2" name="Rectangle 1"/>
@@ -9936,6 +9767,7 @@
           <a:lstStyle/>
           <a:p>
             <a:pPr algn="ctr"/>
+            <a:endParaRPr/>
           </a:p>
         </p:txBody>
       </p:sp>
@@ -10013,6 +9845,7 @@
           <a:lstStyle/>
           <a:p>
             <a:pPr algn="ctr"/>
+            <a:endParaRPr/>
           </a:p>
         </p:txBody>
       </p:sp>
@@ -10050,9 +9883,33 @@
           </a:p>
         </p:txBody>
       </p:sp>
-      <p:sp>
-        <p:nvSpPr>
-          <p:cNvPr id="6" name="TextBox 5"/>
+      <p:pic>
+        <p:nvPicPr>
+          <p:cNvPr id="6" name="Picture 5" descr="readmission_roc.png"/>
+          <p:cNvPicPr>
+            <a:picLocks noChangeAspect="1"/>
+          </p:cNvPicPr>
+          <p:nvPr/>
+        </p:nvPicPr>
+        <p:blipFill>
+          <a:blip r:embed="rId3"/>
+          <a:stretch>
+            <a:fillRect/>
+          </a:stretch>
+        </p:blipFill>
+        <p:spPr>
+          <a:xfrm>
+            <a:off x="228600" y="868680"/>
+            <a:ext cx="7040880" cy="3129280"/>
+          </a:xfrm>
+          <a:prstGeom prst="rect">
+            <a:avLst/>
+          </a:prstGeom>
+        </p:spPr>
+      </p:pic>
+      <p:sp>
+        <p:nvSpPr>
+          <p:cNvPr id="7" name="TextBox 6"/>
           <p:cNvSpPr txBox="1"/>
           <p:nvPr/>
         </p:nvSpPr>
@@ -10178,13 +10035,25 @@
                 <a:spcPts val="300"/>
               </a:spcBef>
             </a:pPr>
+            <a:endParaRPr sz="950">
+              <a:solidFill>
+                <a:srgbClr val="444444"/>
+              </a:solidFill>
+            </a:endParaRPr>
+          </a:p>
+          <a:p>
+            <a:pPr algn="l">
+              <a:spcBef>
+                <a:spcPts val="300"/>
+              </a:spcBef>
+            </a:pPr>
             <a:r>
               <a:rPr sz="950">
                 <a:solidFill>
                   <a:srgbClr val="444444"/>
                 </a:solidFill>
               </a:rPr>
-              <a:t/>
+              <a:t>XGBoost wins by boosting weak trees iteratively.</a:t>
             </a:r>
           </a:p>
           <a:p>
@@ -10199,7 +10068,7 @@
                   <a:srgbClr val="444444"/>
                 </a:solidFill>
               </a:rPr>
-              <a:t>XGBoost wins by boosting weak trees iteratively.</a:t>
+              <a:t>The performance gap is modest — with demographics</a:t>
             </a:r>
           </a:p>
           <a:p>
@@ -10214,21 +10083,6 @@
                   <a:srgbClr val="444444"/>
                 </a:solidFill>
               </a:rPr>
-              <a:t>The performance gap is modest — with demographics</a:t>
-            </a:r>
-          </a:p>
-          <a:p>
-            <a:pPr algn="l">
-              <a:spcBef>
-                <a:spcPts val="300"/>
-              </a:spcBef>
-            </a:pPr>
-            <a:r>
-              <a:rPr sz="950">
-                <a:solidFill>
-                  <a:srgbClr val="444444"/>
-                </a:solidFill>
-              </a:rPr>
               <a:t>only, all models have similar information ceiling.</a:t>
             </a:r>
           </a:p>
@@ -10236,7 +10090,7 @@
       </p:sp>
       <p:sp>
         <p:nvSpPr>
-          <p:cNvPr id="7" name="TextBox 6"/>
+          <p:cNvPr id="8" name="TextBox 7"/>
           <p:cNvSpPr txBox="1"/>
           <p:nvPr/>
         </p:nvSpPr>
@@ -10332,13 +10186,25 @@
                 <a:spcPts val="300"/>
               </a:spcBef>
             </a:pPr>
+            <a:endParaRPr sz="950">
+              <a:solidFill>
+                <a:srgbClr val="444444"/>
+              </a:solidFill>
+            </a:endParaRPr>
+          </a:p>
+          <a:p>
+            <a:pPr algn="l">
+              <a:spcBef>
+                <a:spcPts val="300"/>
+              </a:spcBef>
+            </a:pPr>
             <a:r>
               <a:rPr sz="950">
                 <a:solidFill>
                   <a:srgbClr val="444444"/>
                 </a:solidFill>
               </a:rPr>
-              <a:t/>
+              <a:t>• FN (false negatives) are costly in healthcare</a:t>
             </a:r>
           </a:p>
           <a:p>
@@ -10353,7 +10219,7 @@
                   <a:srgbClr val="444444"/>
                 </a:solidFill>
               </a:rPr>
-              <a:t>• FN (false negatives) are costly in healthcare</a:t>
+              <a:t>  — missed readmissions that could be prevented</a:t>
             </a:r>
           </a:p>
           <a:p>
@@ -10368,7 +10234,7 @@
                   <a:srgbClr val="444444"/>
                 </a:solidFill>
               </a:rPr>
-              <a:t>  — missed readmissions that could be prevented</a:t>
+              <a:t>• Lower threshold → fewer FN, more FP (alert fatigue)</a:t>
             </a:r>
           </a:p>
           <a:p>
@@ -10383,21 +10249,6 @@
                   <a:srgbClr val="444444"/>
                 </a:solidFill>
               </a:rPr>
-              <a:t>• Lower threshold → fewer FN, more FP (alert fatigue)</a:t>
-            </a:r>
-          </a:p>
-          <a:p>
-            <a:pPr algn="l">
-              <a:spcBef>
-                <a:spcPts val="300"/>
-              </a:spcBef>
-            </a:pPr>
-            <a:r>
-              <a:rPr sz="950">
-                <a:solidFill>
-                  <a:srgbClr val="444444"/>
-                </a:solidFill>
-              </a:rPr>
               <a:t>• Clinical deployment: tune threshold to acceptable FN</a:t>
             </a:r>
           </a:p>
@@ -10405,7 +10256,7 @@
       </p:sp>
       <p:sp>
         <p:nvSpPr>
-          <p:cNvPr id="8" name="Rectangle 7"/>
+          <p:cNvPr id="9" name="Rectangle 8"/>
           <p:cNvSpPr/>
           <p:nvPr/>
         </p:nvSpPr>
@@ -10443,12 +10294,13 @@
           <a:lstStyle/>
           <a:p>
             <a:pPr algn="ctr"/>
-          </a:p>
-        </p:txBody>
-      </p:sp>
-      <p:sp>
-        <p:nvSpPr>
-          <p:cNvPr id="9" name="TextBox 8"/>
+            <a:endParaRPr/>
+          </a:p>
+        </p:txBody>
+      </p:sp>
+      <p:sp>
+        <p:nvSpPr>
+          <p:cNvPr id="10" name="TextBox 9"/>
           <p:cNvSpPr txBox="1"/>
           <p:nvPr/>
         </p:nvSpPr>
@@ -10482,7 +10334,7 @@
       </p:sp>
       <p:sp>
         <p:nvSpPr>
-          <p:cNvPr id="10" name="TextBox 9"/>
+          <p:cNvPr id="11" name="TextBox 10"/>
           <p:cNvSpPr txBox="1"/>
           <p:nvPr/>
         </p:nvSpPr>
@@ -10523,7 +10375,7 @@
 </file>
 
 <file path=ppt/slides/slide8.xml><?xml version="1.0" encoding="utf-8"?>
-<p:sld xmlns:a="http://schemas.openxmlformats.org/drawingml/2006/main" xmlns:p="http://schemas.openxmlformats.org/presentationml/2006/main" xmlns:r="http://schemas.openxmlformats.org/officeDocument/2006/relationships">
+<p:sld xmlns:a="http://schemas.openxmlformats.org/drawingml/2006/main" xmlns:r="http://schemas.openxmlformats.org/officeDocument/2006/relationships" xmlns:p="http://schemas.openxmlformats.org/presentationml/2006/main">
   <p:cSld>
     <p:bg>
       <p:bgPr>
@@ -10539,7 +10391,14 @@
         <p:cNvGrpSpPr/>
         <p:nvPr/>
       </p:nvGrpSpPr>
-      <p:grpSpPr/>
+      <p:grpSpPr>
+        <a:xfrm>
+          <a:off x="0" y="0"/>
+          <a:ext cx="0" cy="0"/>
+          <a:chOff x="0" y="0"/>
+          <a:chExt cx="0" cy="0"/>
+        </a:xfrm>
+      </p:grpSpPr>
       <p:sp>
         <p:nvSpPr>
           <p:cNvPr id="2" name="Rectangle 1"/>
@@ -10580,6 +10439,7 @@
           <a:lstStyle/>
           <a:p>
             <a:pPr algn="ctr"/>
+            <a:endParaRPr/>
           </a:p>
         </p:txBody>
       </p:sp>
@@ -10657,6 +10517,7 @@
           <a:lstStyle/>
           <a:p>
             <a:pPr algn="ctr"/>
+            <a:endParaRPr/>
           </a:p>
         </p:txBody>
       </p:sp>
@@ -10694,9 +10555,33 @@
           </a:p>
         </p:txBody>
       </p:sp>
-      <p:sp>
-        <p:nvSpPr>
-          <p:cNvPr id="6" name="TextBox 5"/>
+      <p:pic>
+        <p:nvPicPr>
+          <p:cNvPr id="6" name="Picture 5" descr="readmission_shap.png"/>
+          <p:cNvPicPr>
+            <a:picLocks noChangeAspect="1"/>
+          </p:cNvPicPr>
+          <p:nvPr/>
+        </p:nvPicPr>
+        <p:blipFill>
+          <a:blip r:embed="rId3"/>
+          <a:stretch>
+            <a:fillRect/>
+          </a:stretch>
+        </p:blipFill>
+        <p:spPr>
+          <a:xfrm>
+            <a:off x="228600" y="868680"/>
+            <a:ext cx="6399996" cy="5897880"/>
+          </a:xfrm>
+          <a:prstGeom prst="rect">
+            <a:avLst/>
+          </a:prstGeom>
+        </p:spPr>
+      </p:pic>
+      <p:sp>
+        <p:nvSpPr>
+          <p:cNvPr id="7" name="TextBox 6"/>
           <p:cNvSpPr txBox="1"/>
           <p:nvPr/>
         </p:nvSpPr>
@@ -10807,13 +10692,25 @@
                 <a:spcPts val="300"/>
               </a:spcBef>
             </a:pPr>
+            <a:endParaRPr sz="950">
+              <a:solidFill>
+                <a:srgbClr val="444444"/>
+              </a:solidFill>
+            </a:endParaRPr>
+          </a:p>
+          <a:p>
+            <a:pPr algn="l">
+              <a:spcBef>
+                <a:spcPts val="300"/>
+              </a:spcBef>
+            </a:pPr>
             <a:r>
               <a:rPr sz="950">
                 <a:solidFill>
                   <a:srgbClr val="444444"/>
                 </a:solidFill>
               </a:rPr>
-              <a:t/>
+              <a:t>Reading the beeswarm plot:</a:t>
             </a:r>
           </a:p>
           <a:p>
@@ -10828,7 +10725,7 @@
                   <a:srgbClr val="444444"/>
                 </a:solidFill>
               </a:rPr>
-              <a:t>Reading the beeswarm plot:</a:t>
+              <a:t>  X-axis  = SHAP value (positive → readmission risk ↑)</a:t>
             </a:r>
           </a:p>
           <a:p>
@@ -10843,7 +10740,7 @@
                   <a:srgbClr val="444444"/>
                 </a:solidFill>
               </a:rPr>
-              <a:t>  X-axis  = SHAP value (positive → readmission risk ↑)</a:t>
+              <a:t>  Y-axis  = features ranked by mean |SHAP|</a:t>
             </a:r>
           </a:p>
           <a:p>
@@ -10858,7 +10755,7 @@
                   <a:srgbClr val="444444"/>
                 </a:solidFill>
               </a:rPr>
-              <a:t>  Y-axis  = features ranked by mean |SHAP|</a:t>
+              <a:t>  Color   = feature value (red=high, blue=low)</a:t>
             </a:r>
           </a:p>
           <a:p>
@@ -10873,21 +10770,6 @@
                   <a:srgbClr val="444444"/>
                 </a:solidFill>
               </a:rPr>
-              <a:t>  Color   = feature value (red=high, blue=low)</a:t>
-            </a:r>
-          </a:p>
-          <a:p>
-            <a:pPr algn="l">
-              <a:spcBef>
-                <a:spcPts val="300"/>
-              </a:spcBef>
-            </a:pPr>
-            <a:r>
-              <a:rPr sz="950">
-                <a:solidFill>
-                  <a:srgbClr val="444444"/>
-                </a:solidFill>
-              </a:rPr>
               <a:t>  Each dot = one patient in the test set</a:t>
             </a:r>
           </a:p>
@@ -10895,7 +10777,7 @@
       </p:sp>
       <p:sp>
         <p:nvSpPr>
-          <p:cNvPr id="7" name="TextBox 6"/>
+          <p:cNvPr id="8" name="TextBox 7"/>
           <p:cNvSpPr txBox="1"/>
           <p:nvPr/>
         </p:nvSpPr>
@@ -10976,13 +10858,25 @@
                 <a:spcPts val="300"/>
               </a:spcBef>
             </a:pPr>
+            <a:endParaRPr sz="950">
+              <a:solidFill>
+                <a:srgbClr val="444444"/>
+              </a:solidFill>
+            </a:endParaRPr>
+          </a:p>
+          <a:p>
+            <a:pPr algn="l">
+              <a:spcBef>
+                <a:spcPts val="300"/>
+              </a:spcBef>
+            </a:pPr>
             <a:r>
               <a:rPr sz="950">
                 <a:solidFill>
                   <a:srgbClr val="444444"/>
                 </a:solidFill>
               </a:rPr>
-              <a:t/>
+              <a:t>insurance_Medicare</a:t>
             </a:r>
           </a:p>
           <a:p>
@@ -10997,7 +10891,7 @@
                   <a:srgbClr val="444444"/>
                 </a:solidFill>
               </a:rPr>
-              <a:t>insurance_Medicare</a:t>
+              <a:t>  Medicare correlates with age + disease severity</a:t>
             </a:r>
           </a:p>
           <a:p>
@@ -11012,8 +10906,20 @@
                   <a:srgbClr val="444444"/>
                 </a:solidFill>
               </a:rPr>
-              <a:t>  Medicare correlates with age + disease severity</a:t>
-            </a:r>
+              <a:t>  Positive SHAP: Medicare patients are higher risk</a:t>
+            </a:r>
+          </a:p>
+          <a:p>
+            <a:pPr algn="l">
+              <a:spcBef>
+                <a:spcPts val="300"/>
+              </a:spcBef>
+            </a:pPr>
+            <a:endParaRPr sz="950">
+              <a:solidFill>
+                <a:srgbClr val="444444"/>
+              </a:solidFill>
+            </a:endParaRPr>
           </a:p>
           <a:p>
             <a:pPr algn="l">
@@ -11027,7 +10933,7 @@
                   <a:srgbClr val="444444"/>
                 </a:solidFill>
               </a:rPr>
-              <a:t>  Positive SHAP: Medicare patients are higher risk</a:t>
+              <a:t>admission_type_EMERGENCY</a:t>
             </a:r>
           </a:p>
           <a:p>
@@ -11042,7 +10948,7 @@
                   <a:srgbClr val="444444"/>
                 </a:solidFill>
               </a:rPr>
-              <a:t/>
+              <a:t>  Emergency admissions = acute, unplanned illness</a:t>
             </a:r>
           </a:p>
           <a:p>
@@ -11057,8 +10963,20 @@
                   <a:srgbClr val="444444"/>
                 </a:solidFill>
               </a:rPr>
-              <a:t>admission_type_EMERGENCY</a:t>
-            </a:r>
+              <a:t>  Positive SHAP: emergency entry predicts return</a:t>
+            </a:r>
+          </a:p>
+          <a:p>
+            <a:pPr algn="l">
+              <a:spcBef>
+                <a:spcPts val="300"/>
+              </a:spcBef>
+            </a:pPr>
+            <a:endParaRPr sz="950">
+              <a:solidFill>
+                <a:srgbClr val="444444"/>
+              </a:solidFill>
+            </a:endParaRPr>
           </a:p>
           <a:p>
             <a:pPr algn="l">
@@ -11072,7 +10990,7 @@
                   <a:srgbClr val="444444"/>
                 </a:solidFill>
               </a:rPr>
-              <a:t>  Emergency admissions = acute, unplanned illness</a:t>
+              <a:t>insurance_Private</a:t>
             </a:r>
           </a:p>
           <a:p>
@@ -11087,51 +11005,6 @@
                   <a:srgbClr val="444444"/>
                 </a:solidFill>
               </a:rPr>
-              <a:t>  Positive SHAP: emergency entry predicts return</a:t>
-            </a:r>
-          </a:p>
-          <a:p>
-            <a:pPr algn="l">
-              <a:spcBef>
-                <a:spcPts val="300"/>
-              </a:spcBef>
-            </a:pPr>
-            <a:r>
-              <a:rPr sz="950">
-                <a:solidFill>
-                  <a:srgbClr val="444444"/>
-                </a:solidFill>
-              </a:rPr>
-              <a:t/>
-            </a:r>
-          </a:p>
-          <a:p>
-            <a:pPr algn="l">
-              <a:spcBef>
-                <a:spcPts val="300"/>
-              </a:spcBef>
-            </a:pPr>
-            <a:r>
-              <a:rPr sz="950">
-                <a:solidFill>
-                  <a:srgbClr val="444444"/>
-                </a:solidFill>
-              </a:rPr>
-              <a:t>insurance_Private</a:t>
-            </a:r>
-          </a:p>
-          <a:p>
-            <a:pPr algn="l">
-              <a:spcBef>
-                <a:spcPts val="300"/>
-              </a:spcBef>
-            </a:pPr>
-            <a:r>
-              <a:rPr sz="950">
-                <a:solidFill>
-                  <a:srgbClr val="444444"/>
-                </a:solidFill>
-              </a:rPr>
               <a:t>  Typically negative SHAP: younger, healthier population</a:t>
             </a:r>
           </a:p>
@@ -11139,7 +11012,7 @@
       </p:sp>
       <p:sp>
         <p:nvSpPr>
-          <p:cNvPr id="8" name="Rectangle 7"/>
+          <p:cNvPr id="9" name="Rectangle 8"/>
           <p:cNvSpPr/>
           <p:nvPr/>
         </p:nvSpPr>
@@ -11177,12 +11050,13 @@
           <a:lstStyle/>
           <a:p>
             <a:pPr algn="ctr"/>
-          </a:p>
-        </p:txBody>
-      </p:sp>
-      <p:sp>
-        <p:nvSpPr>
-          <p:cNvPr id="9" name="TextBox 8"/>
+            <a:endParaRPr/>
+          </a:p>
+        </p:txBody>
+      </p:sp>
+      <p:sp>
+        <p:nvSpPr>
+          <p:cNvPr id="10" name="TextBox 9"/>
           <p:cNvSpPr txBox="1"/>
           <p:nvPr/>
         </p:nvSpPr>
@@ -11216,7 +11090,7 @@
       </p:sp>
       <p:sp>
         <p:nvSpPr>
-          <p:cNvPr id="10" name="TextBox 9"/>
+          <p:cNvPr id="11" name="TextBox 10"/>
           <p:cNvSpPr txBox="1"/>
           <p:nvPr/>
         </p:nvSpPr>
@@ -11257,7 +11131,7 @@
 </file>
 
 <file path=ppt/slides/slide9.xml><?xml version="1.0" encoding="utf-8"?>
-<p:sld xmlns:a="http://schemas.openxmlformats.org/drawingml/2006/main" xmlns:p="http://schemas.openxmlformats.org/presentationml/2006/main" xmlns:r="http://schemas.openxmlformats.org/officeDocument/2006/relationships">
+<p:sld xmlns:a="http://schemas.openxmlformats.org/drawingml/2006/main" xmlns:r="http://schemas.openxmlformats.org/officeDocument/2006/relationships" xmlns:p="http://schemas.openxmlformats.org/presentationml/2006/main">
   <p:cSld>
     <p:bg>
       <p:bgPr>
@@ -11273,7 +11147,14 @@
         <p:cNvGrpSpPr/>
         <p:nvPr/>
       </p:nvGrpSpPr>
-      <p:grpSpPr/>
+      <p:grpSpPr>
+        <a:xfrm>
+          <a:off x="0" y="0"/>
+          <a:ext cx="0" cy="0"/>
+          <a:chOff x="0" y="0"/>
+          <a:chExt cx="0" cy="0"/>
+        </a:xfrm>
+      </p:grpSpPr>
       <p:sp>
         <p:nvSpPr>
           <p:cNvPr id="2" name="Rectangle 1"/>
@@ -11314,6 +11195,7 @@
           <a:lstStyle/>
           <a:p>
             <a:pPr algn="ctr"/>
+            <a:endParaRPr/>
           </a:p>
         </p:txBody>
       </p:sp>
@@ -11391,6 +11273,7 @@
           <a:lstStyle/>
           <a:p>
             <a:pPr algn="ctr"/>
+            <a:endParaRPr/>
           </a:p>
         </p:txBody>
       </p:sp>
@@ -11468,6 +11351,7 @@
           <a:lstStyle/>
           <a:p>
             <a:pPr algn="ctr"/>
+            <a:endParaRPr/>
           </a:p>
         </p:txBody>
       </p:sp>
@@ -11607,13 +11491,25 @@
                 <a:spcPts val="300"/>
               </a:spcBef>
             </a:pPr>
+            <a:endParaRPr sz="950">
+              <a:solidFill>
+                <a:srgbClr val="444444"/>
+              </a:solidFill>
+            </a:endParaRPr>
+          </a:p>
+          <a:p>
+            <a:pPr algn="l">
+              <a:spcBef>
+                <a:spcPts val="300"/>
+              </a:spcBef>
+            </a:pPr>
             <a:r>
               <a:rPr sz="950">
                 <a:solidFill>
                   <a:srgbClr val="444444"/>
                 </a:solidFill>
               </a:rPr>
-              <a:t/>
+              <a:t>✗ Assumes linear decision boundary</a:t>
             </a:r>
           </a:p>
           <a:p>
@@ -11628,7 +11524,7 @@
                   <a:srgbClr val="444444"/>
                 </a:solidFill>
               </a:rPr>
-              <a:t>✗ Assumes linear decision boundary</a:t>
+              <a:t>✗ Cannot capture feature interactions</a:t>
             </a:r>
           </a:p>
           <a:p>
@@ -11643,7 +11539,7 @@
                   <a:srgbClr val="444444"/>
                 </a:solidFill>
               </a:rPr>
-              <a:t>✗ Cannot capture feature interactions</a:t>
+              <a:t>  (e.g., age × insurance interaction)</a:t>
             </a:r>
           </a:p>
           <a:p>
@@ -11658,8 +11554,20 @@
                   <a:srgbClr val="444444"/>
                 </a:solidFill>
               </a:rPr>
-              <a:t>  (e.g., age × insurance interaction)</a:t>
-            </a:r>
+              <a:t>✗ Lowest AUC (~0.64)</a:t>
+            </a:r>
+          </a:p>
+          <a:p>
+            <a:pPr algn="l">
+              <a:spcBef>
+                <a:spcPts val="300"/>
+              </a:spcBef>
+            </a:pPr>
+            <a:endParaRPr sz="950">
+              <a:solidFill>
+                <a:srgbClr val="444444"/>
+              </a:solidFill>
+            </a:endParaRPr>
           </a:p>
           <a:p>
             <a:pPr algn="l">
@@ -11673,36 +11581,6 @@
                   <a:srgbClr val="444444"/>
                 </a:solidFill>
               </a:rPr>
-              <a:t>✗ Lowest AUC (~0.64)</a:t>
-            </a:r>
-          </a:p>
-          <a:p>
-            <a:pPr algn="l">
-              <a:spcBef>
-                <a:spcPts val="300"/>
-              </a:spcBef>
-            </a:pPr>
-            <a:r>
-              <a:rPr sz="950">
-                <a:solidFill>
-                  <a:srgbClr val="444444"/>
-                </a:solidFill>
-              </a:rPr>
-              <a:t/>
-            </a:r>
-          </a:p>
-          <a:p>
-            <a:pPr algn="l">
-              <a:spcBef>
-                <a:spcPts val="300"/>
-              </a:spcBef>
-            </a:pPr>
-            <a:r>
-              <a:rPr sz="950">
-                <a:solidFill>
-                  <a:srgbClr val="444444"/>
-                </a:solidFill>
-              </a:rPr>
               <a:t>Typical AUC: ~0.64</a:t>
             </a:r>
           </a:p>
@@ -11712,14 +11590,11 @@
                 <a:spcPts val="300"/>
               </a:spcBef>
             </a:pPr>
-            <a:r>
-              <a:rPr sz="950">
-                <a:solidFill>
-                  <a:srgbClr val="444444"/>
-                </a:solidFill>
-              </a:rPr>
-              <a:t/>
-            </a:r>
+            <a:endParaRPr sz="950">
+              <a:solidFill>
+                <a:srgbClr val="444444"/>
+              </a:solidFill>
+            </a:endParaRPr>
           </a:p>
           <a:p>
             <a:pPr algn="l">
@@ -11823,6 +11698,7 @@
           <a:lstStyle/>
           <a:p>
             <a:pPr algn="ctr"/>
+            <a:endParaRPr/>
           </a:p>
         </p:txBody>
       </p:sp>
@@ -11962,13 +11838,25 @@
                 <a:spcPts val="300"/>
               </a:spcBef>
             </a:pPr>
+            <a:endParaRPr sz="950">
+              <a:solidFill>
+                <a:srgbClr val="444444"/>
+              </a:solidFill>
+            </a:endParaRPr>
+          </a:p>
+          <a:p>
+            <a:pPr algn="l">
+              <a:spcBef>
+                <a:spcPts val="300"/>
+              </a:spcBef>
+            </a:pPr>
             <a:r>
               <a:rPr sz="950">
                 <a:solidFill>
                   <a:srgbClr val="444444"/>
                 </a:solidFill>
               </a:rPr>
-              <a:t/>
+              <a:t>✗ Slower than LR (200 trees × ~58K rows)</a:t>
             </a:r>
           </a:p>
           <a:p>
@@ -11983,7 +11871,7 @@
                   <a:srgbClr val="444444"/>
                 </a:solidFill>
               </a:rPr>
-              <a:t>✗ Slower than LR (200 trees × ~58K rows)</a:t>
+              <a:t>✗ Memory-intensive for large feature sets</a:t>
             </a:r>
           </a:p>
           <a:p>
@@ -11998,7 +11886,7 @@
                   <a:srgbClr val="444444"/>
                 </a:solidFill>
               </a:rPr>
-              <a:t>✗ Memory-intensive for large feature sets</a:t>
+              <a:t>✗ Feature importance biased toward</a:t>
             </a:r>
           </a:p>
           <a:p>
@@ -12013,8 +11901,20 @@
                   <a:srgbClr val="444444"/>
                 </a:solidFill>
               </a:rPr>
-              <a:t>✗ Feature importance biased toward</a:t>
-            </a:r>
+              <a:t>  high-cardinality categoricals</a:t>
+            </a:r>
+          </a:p>
+          <a:p>
+            <a:pPr algn="l">
+              <a:spcBef>
+                <a:spcPts val="300"/>
+              </a:spcBef>
+            </a:pPr>
+            <a:endParaRPr sz="950">
+              <a:solidFill>
+                <a:srgbClr val="444444"/>
+              </a:solidFill>
+            </a:endParaRPr>
           </a:p>
           <a:p>
             <a:pPr algn="l">
@@ -12028,36 +11928,6 @@
                   <a:srgbClr val="444444"/>
                 </a:solidFill>
               </a:rPr>
-              <a:t>  high-cardinality categoricals</a:t>
-            </a:r>
-          </a:p>
-          <a:p>
-            <a:pPr algn="l">
-              <a:spcBef>
-                <a:spcPts val="300"/>
-              </a:spcBef>
-            </a:pPr>
-            <a:r>
-              <a:rPr sz="950">
-                <a:solidFill>
-                  <a:srgbClr val="444444"/>
-                </a:solidFill>
-              </a:rPr>
-              <a:t/>
-            </a:r>
-          </a:p>
-          <a:p>
-            <a:pPr algn="l">
-              <a:spcBef>
-                <a:spcPts val="300"/>
-              </a:spcBef>
-            </a:pPr>
-            <a:r>
-              <a:rPr sz="950">
-                <a:solidFill>
-                  <a:srgbClr val="444444"/>
-                </a:solidFill>
-              </a:rPr>
               <a:t>Typical AUC: ~0.66</a:t>
             </a:r>
           </a:p>
@@ -12067,14 +11937,11 @@
                 <a:spcPts val="300"/>
               </a:spcBef>
             </a:pPr>
-            <a:r>
-              <a:rPr sz="950">
-                <a:solidFill>
-                  <a:srgbClr val="444444"/>
-                </a:solidFill>
-              </a:rPr>
-              <a:t/>
-            </a:r>
+            <a:endParaRPr sz="950">
+              <a:solidFill>
+                <a:srgbClr val="444444"/>
+              </a:solidFill>
+            </a:endParaRPr>
           </a:p>
           <a:p>
             <a:pPr algn="l">
@@ -12178,6 +12045,7 @@
           <a:lstStyle/>
           <a:p>
             <a:pPr algn="ctr"/>
+            <a:endParaRPr/>
           </a:p>
         </p:txBody>
       </p:sp>
@@ -12317,13 +12185,25 @@
                 <a:spcPts val="300"/>
               </a:spcBef>
             </a:pPr>
+            <a:endParaRPr sz="950">
+              <a:solidFill>
+                <a:srgbClr val="444444"/>
+              </a:solidFill>
+            </a:endParaRPr>
+          </a:p>
+          <a:p>
+            <a:pPr algn="l">
+              <a:spcBef>
+                <a:spcPts val="300"/>
+              </a:spcBef>
+            </a:pPr>
             <a:r>
               <a:rPr sz="950">
                 <a:solidFill>
                   <a:srgbClr val="444444"/>
                 </a:solidFill>
               </a:rPr>
-              <a:t/>
+              <a:t>✗ More hyperparameters to tune</a:t>
             </a:r>
           </a:p>
           <a:p>
@@ -12338,7 +12218,7 @@
                   <a:srgbClr val="444444"/>
                 </a:solidFill>
               </a:rPr>
-              <a:t>✗ More hyperparameters to tune</a:t>
+              <a:t>✗ Risk of overfitting if not regularized</a:t>
             </a:r>
           </a:p>
           <a:p>
@@ -12353,7 +12233,7 @@
                   <a:srgbClr val="444444"/>
                 </a:solidFill>
               </a:rPr>
-              <a:t>✗ Risk of overfitting if not regularized</a:t>
+              <a:t>✗ Sequential training (not parallelized</a:t>
             </a:r>
           </a:p>
           <a:p>
@@ -12368,8 +12248,20 @@
                   <a:srgbClr val="444444"/>
                 </a:solidFill>
               </a:rPr>
-              <a:t>✗ Sequential training (not parallelized</a:t>
-            </a:r>
+              <a:t>  across boosting rounds)</a:t>
+            </a:r>
+          </a:p>
+          <a:p>
+            <a:pPr algn="l">
+              <a:spcBef>
+                <a:spcPts val="300"/>
+              </a:spcBef>
+            </a:pPr>
+            <a:endParaRPr sz="950">
+              <a:solidFill>
+                <a:srgbClr val="444444"/>
+              </a:solidFill>
+            </a:endParaRPr>
           </a:p>
           <a:p>
             <a:pPr algn="l">
@@ -12383,36 +12275,6 @@
                   <a:srgbClr val="444444"/>
                 </a:solidFill>
               </a:rPr>
-              <a:t>  across boosting rounds)</a:t>
-            </a:r>
-          </a:p>
-          <a:p>
-            <a:pPr algn="l">
-              <a:spcBef>
-                <a:spcPts val="300"/>
-              </a:spcBef>
-            </a:pPr>
-            <a:r>
-              <a:rPr sz="950">
-                <a:solidFill>
-                  <a:srgbClr val="444444"/>
-                </a:solidFill>
-              </a:rPr>
-              <a:t/>
-            </a:r>
-          </a:p>
-          <a:p>
-            <a:pPr algn="l">
-              <a:spcBef>
-                <a:spcPts val="300"/>
-              </a:spcBef>
-            </a:pPr>
-            <a:r>
-              <a:rPr sz="950">
-                <a:solidFill>
-                  <a:srgbClr val="444444"/>
-                </a:solidFill>
-              </a:rPr>
               <a:t>Typical AUC: ~0.68</a:t>
             </a:r>
           </a:p>
@@ -12422,14 +12284,11 @@
                 <a:spcPts val="300"/>
               </a:spcBef>
             </a:pPr>
-            <a:r>
-              <a:rPr sz="950">
-                <a:solidFill>
-                  <a:srgbClr val="444444"/>
-                </a:solidFill>
-              </a:rPr>
-              <a:t/>
-            </a:r>
+            <a:endParaRPr sz="950">
+              <a:solidFill>
+                <a:srgbClr val="444444"/>
+              </a:solidFill>
+            </a:endParaRPr>
           </a:p>
           <a:p>
             <a:pPr algn="l">
@@ -12533,6 +12392,7 @@
           <a:lstStyle/>
           <a:p>
             <a:pPr algn="ctr"/>
+            <a:endParaRPr/>
           </a:p>
         </p:txBody>
       </p:sp>
@@ -12909,44 +12769,44 @@
         <a:sysClr val="window" lastClr="FFFFFF"/>
       </a:lt1>
       <a:dk2>
-        <a:srgbClr val="1F497D"/>
+        <a:srgbClr val="0E2841"/>
       </a:dk2>
       <a:lt2>
-        <a:srgbClr val="EEECE1"/>
+        <a:srgbClr val="E8E8E8"/>
       </a:lt2>
       <a:accent1>
-        <a:srgbClr val="4F81BD"/>
+        <a:srgbClr val="156082"/>
       </a:accent1>
       <a:accent2>
-        <a:srgbClr val="C0504D"/>
+        <a:srgbClr val="E97132"/>
       </a:accent2>
       <a:accent3>
-        <a:srgbClr val="9BBB59"/>
+        <a:srgbClr val="196B24"/>
       </a:accent3>
       <a:accent4>
-        <a:srgbClr val="8064A2"/>
+        <a:srgbClr val="0F9ED5"/>
       </a:accent4>
       <a:accent5>
-        <a:srgbClr val="4BACC6"/>
+        <a:srgbClr val="A02B93"/>
       </a:accent5>
       <a:accent6>
-        <a:srgbClr val="F79646"/>
+        <a:srgbClr val="4EA72E"/>
       </a:accent6>
       <a:hlink>
-        <a:srgbClr val="0000FF"/>
+        <a:srgbClr val="467886"/>
       </a:hlink>
       <a:folHlink>
-        <a:srgbClr val="800080"/>
+        <a:srgbClr val="96607D"/>
       </a:folHlink>
     </a:clrScheme>
     <a:fontScheme name="Office">
       <a:majorFont>
-        <a:latin typeface="Calibri"/>
+        <a:latin typeface="Aptos Display" panose="02110004020202020204"/>
         <a:ea typeface=""/>
         <a:cs typeface=""/>
-        <a:font script="Jpan" typeface="ＭＳ Ｐゴシック"/>
+        <a:font script="Jpan" typeface="游ゴシック Light"/>
         <a:font script="Hang" typeface="맑은 고딕"/>
-        <a:font script="Hans" typeface="宋体"/>
+        <a:font script="Hans" typeface="等线 Light"/>
         <a:font script="Hant" typeface="新細明體"/>
         <a:font script="Arab" typeface="Times New Roman"/>
         <a:font script="Hebr" typeface="Times New Roman"/>
@@ -12974,14 +12834,31 @@
         <a:font script="Viet" typeface="Times New Roman"/>
         <a:font script="Uigh" typeface="Microsoft Uighur"/>
         <a:font script="Geor" typeface="Sylfaen"/>
+        <a:font script="Armn" typeface="Arial"/>
+        <a:font script="Bugi" typeface="Leelawadee UI"/>
+        <a:font script="Bopo" typeface="Microsoft JhengHei"/>
+        <a:font script="Java" typeface="Javanese Text"/>
+        <a:font script="Lisu" typeface="Segoe UI"/>
+        <a:font script="Mymr" typeface="Myanmar Text"/>
+        <a:font script="Nkoo" typeface="Ebrima"/>
+        <a:font script="Olck" typeface="Nirmala UI"/>
+        <a:font script="Osma" typeface="Ebrima"/>
+        <a:font script="Phag" typeface="Phagspa"/>
+        <a:font script="Syrn" typeface="Estrangelo Edessa"/>
+        <a:font script="Syrj" typeface="Estrangelo Edessa"/>
+        <a:font script="Syre" typeface="Estrangelo Edessa"/>
+        <a:font script="Sora" typeface="Nirmala UI"/>
+        <a:font script="Tale" typeface="Microsoft Tai Le"/>
+        <a:font script="Talu" typeface="Microsoft New Tai Lue"/>
+        <a:font script="Tfng" typeface="Ebrima"/>
       </a:majorFont>
       <a:minorFont>
-        <a:latin typeface="Calibri"/>
+        <a:latin typeface="Aptos" panose="02110004020202020204"/>
         <a:ea typeface=""/>
         <a:cs typeface=""/>
-        <a:font script="Jpan" typeface="ＭＳ Ｐゴシック"/>
+        <a:font script="Jpan" typeface="游ゴシック"/>
         <a:font script="Hang" typeface="맑은 고딕"/>
-        <a:font script="Hans" typeface="宋体"/>
+        <a:font script="Hans" typeface="等线"/>
         <a:font script="Hant" typeface="新細明體"/>
         <a:font script="Arab" typeface="Arial"/>
         <a:font script="Hebr" typeface="Arial"/>
@@ -13009,6 +12886,23 @@
         <a:font script="Viet" typeface="Arial"/>
         <a:font script="Uigh" typeface="Microsoft Uighur"/>
         <a:font script="Geor" typeface="Sylfaen"/>
+        <a:font script="Armn" typeface="Arial"/>
+        <a:font script="Bugi" typeface="Leelawadee UI"/>
+        <a:font script="Bopo" typeface="Microsoft JhengHei"/>
+        <a:font script="Java" typeface="Javanese Text"/>
+        <a:font script="Lisu" typeface="Segoe UI"/>
+        <a:font script="Mymr" typeface="Myanmar Text"/>
+        <a:font script="Nkoo" typeface="Ebrima"/>
+        <a:font script="Olck" typeface="Nirmala UI"/>
+        <a:font script="Osma" typeface="Ebrima"/>
+        <a:font script="Phag" typeface="Phagspa"/>
+        <a:font script="Syrn" typeface="Estrangelo Edessa"/>
+        <a:font script="Syrj" typeface="Estrangelo Edessa"/>
+        <a:font script="Syre" typeface="Estrangelo Edessa"/>
+        <a:font script="Sora" typeface="Nirmala UI"/>
+        <a:font script="Tale" typeface="Microsoft Tai Le"/>
+        <a:font script="Talu" typeface="Microsoft New Tai Lue"/>
+        <a:font script="Tfng" typeface="Ebrima"/>
       </a:minorFont>
     </a:fontScheme>
     <a:fmtScheme name="Office">
@@ -13020,180 +12914,136 @@
           <a:gsLst>
             <a:gs pos="0">
               <a:schemeClr val="phClr">
-                <a:tint val="50000"/>
-                <a:satMod val="300000"/>
+                <a:lumMod val="110000"/>
+                <a:satMod val="105000"/>
+                <a:tint val="67000"/>
               </a:schemeClr>
             </a:gs>
-            <a:gs pos="35000">
+            <a:gs pos="50000">
               <a:schemeClr val="phClr">
-                <a:tint val="37000"/>
-                <a:satMod val="300000"/>
+                <a:lumMod val="105000"/>
+                <a:satMod val="103000"/>
+                <a:tint val="73000"/>
               </a:schemeClr>
             </a:gs>
             <a:gs pos="100000">
               <a:schemeClr val="phClr">
-                <a:tint val="15000"/>
-                <a:satMod val="350000"/>
+                <a:lumMod val="105000"/>
+                <a:satMod val="109000"/>
+                <a:tint val="81000"/>
               </a:schemeClr>
             </a:gs>
           </a:gsLst>
-          <a:lin ang="16200000" scaled="1"/>
+          <a:lin ang="5400000" scaled="0"/>
         </a:gradFill>
         <a:gradFill rotWithShape="1">
           <a:gsLst>
             <a:gs pos="0">
               <a:schemeClr val="phClr">
-                <a:tint val="100000"/>
+                <a:satMod val="103000"/>
+                <a:lumMod val="102000"/>
+                <a:tint val="94000"/>
+              </a:schemeClr>
+            </a:gs>
+            <a:gs pos="50000">
+              <a:schemeClr val="phClr">
+                <a:satMod val="110000"/>
+                <a:lumMod val="100000"/>
                 <a:shade val="100000"/>
-                <a:satMod val="130000"/>
               </a:schemeClr>
             </a:gs>
             <a:gs pos="100000">
               <a:schemeClr val="phClr">
-                <a:tint val="50000"/>
-                <a:shade val="100000"/>
-                <a:satMod val="350000"/>
+                <a:lumMod val="99000"/>
+                <a:satMod val="120000"/>
+                <a:shade val="78000"/>
               </a:schemeClr>
             </a:gs>
           </a:gsLst>
-          <a:lin ang="16200000" scaled="0"/>
+          <a:lin ang="5400000" scaled="0"/>
         </a:gradFill>
       </a:fillStyleLst>
       <a:lnStyleLst>
-        <a:ln w="9525" cap="flat" cmpd="sng" algn="ctr">
+        <a:ln w="12700" cap="flat" cmpd="sng" algn="ctr">
           <a:solidFill>
-            <a:schemeClr val="phClr">
-              <a:shade val="95000"/>
-              <a:satMod val="105000"/>
-            </a:schemeClr>
+            <a:schemeClr val="phClr"/>
           </a:solidFill>
           <a:prstDash val="solid"/>
+          <a:miter lim="800000"/>
+        </a:ln>
+        <a:ln w="19050" cap="flat" cmpd="sng" algn="ctr">
+          <a:solidFill>
+            <a:schemeClr val="phClr"/>
+          </a:solidFill>
+          <a:prstDash val="solid"/>
+          <a:miter lim="800000"/>
         </a:ln>
         <a:ln w="25400" cap="flat" cmpd="sng" algn="ctr">
           <a:solidFill>
             <a:schemeClr val="phClr"/>
           </a:solidFill>
           <a:prstDash val="solid"/>
-        </a:ln>
-        <a:ln w="38100" cap="flat" cmpd="sng" algn="ctr">
-          <a:solidFill>
-            <a:schemeClr val="phClr"/>
-          </a:solidFill>
-          <a:prstDash val="solid"/>
+          <a:miter lim="800000"/>
         </a:ln>
       </a:lnStyleLst>
       <a:effectStyleLst>
         <a:effectStyle>
+          <a:effectLst/>
+        </a:effectStyle>
+        <a:effectStyle>
+          <a:effectLst/>
+        </a:effectStyle>
+        <a:effectStyle>
           <a:effectLst>
-            <a:outerShdw blurRad="40000" dist="20000" dir="5400000" rotWithShape="0">
+            <a:outerShdw blurRad="57150" dist="19050" dir="5400000" algn="ctr" rotWithShape="0">
               <a:srgbClr val="000000">
-                <a:alpha val="38000"/>
+                <a:alpha val="63000"/>
               </a:srgbClr>
             </a:outerShdw>
           </a:effectLst>
-        </a:effectStyle>
-        <a:effectStyle>
-          <a:effectLst>
-            <a:outerShdw blurRad="40000" dist="23000" dir="5400000" rotWithShape="0">
-              <a:srgbClr val="000000">
-                <a:alpha val="35000"/>
-              </a:srgbClr>
-            </a:outerShdw>
-          </a:effectLst>
-        </a:effectStyle>
-        <a:effectStyle>
-          <a:effectLst>
-            <a:outerShdw blurRad="40000" dist="23000" dir="5400000" rotWithShape="0">
-              <a:srgbClr val="000000">
-                <a:alpha val="35000"/>
-              </a:srgbClr>
-            </a:outerShdw>
-          </a:effectLst>
-          <a:scene3d>
-            <a:camera prst="orthographicFront">
-              <a:rot lat="0" lon="0" rev="0"/>
-            </a:camera>
-            <a:lightRig rig="threePt" dir="t">
-              <a:rot lat="0" lon="0" rev="1200000"/>
-            </a:lightRig>
-          </a:scene3d>
-          <a:sp3d>
-            <a:bevelT w="63500" h="25400"/>
-          </a:sp3d>
         </a:effectStyle>
       </a:effectStyleLst>
       <a:bgFillStyleLst>
         <a:solidFill>
           <a:schemeClr val="phClr"/>
         </a:solidFill>
+        <a:solidFill>
+          <a:schemeClr val="phClr">
+            <a:tint val="95000"/>
+            <a:satMod val="170000"/>
+          </a:schemeClr>
+        </a:solidFill>
         <a:gradFill rotWithShape="1">
           <a:gsLst>
             <a:gs pos="0">
               <a:schemeClr val="phClr">
-                <a:tint val="40000"/>
-                <a:satMod val="350000"/>
+                <a:tint val="93000"/>
+                <a:satMod val="150000"/>
+                <a:shade val="98000"/>
+                <a:lumMod val="102000"/>
               </a:schemeClr>
             </a:gs>
-            <a:gs pos="40000">
+            <a:gs pos="50000">
               <a:schemeClr val="phClr">
-                <a:tint val="45000"/>
-                <a:shade val="99000"/>
-                <a:satMod val="350000"/>
+                <a:tint val="98000"/>
+                <a:satMod val="130000"/>
+                <a:shade val="90000"/>
+                <a:lumMod val="103000"/>
               </a:schemeClr>
             </a:gs>
             <a:gs pos="100000">
               <a:schemeClr val="phClr">
-                <a:shade val="20000"/>
-                <a:satMod val="255000"/>
+                <a:shade val="63000"/>
+                <a:satMod val="120000"/>
               </a:schemeClr>
             </a:gs>
           </a:gsLst>
-          <a:path path="circle">
-            <a:fillToRect l="50000" t="-80000" r="50000" b="180000"/>
-          </a:path>
-        </a:gradFill>
-        <a:gradFill rotWithShape="1">
-          <a:gsLst>
-            <a:gs pos="0">
-              <a:schemeClr val="phClr">
-                <a:tint val="80000"/>
-                <a:satMod val="300000"/>
-              </a:schemeClr>
-            </a:gs>
-            <a:gs pos="100000">
-              <a:schemeClr val="phClr">
-                <a:shade val="30000"/>
-                <a:satMod val="200000"/>
-              </a:schemeClr>
-            </a:gs>
-          </a:gsLst>
-          <a:path path="circle">
-            <a:fillToRect l="50000" t="50000" r="50000" b="50000"/>
-          </a:path>
+          <a:lin ang="5400000" scaled="0"/>
         </a:gradFill>
       </a:bgFillStyleLst>
     </a:fmtScheme>
   </a:themeElements>
   <a:objectDefaults>
-    <a:spDef>
-      <a:spPr/>
-      <a:bodyPr/>
-      <a:lstStyle/>
-      <a:style>
-        <a:lnRef idx="1">
-          <a:schemeClr val="accent1"/>
-        </a:lnRef>
-        <a:fillRef idx="3">
-          <a:schemeClr val="accent1"/>
-        </a:fillRef>
-        <a:effectRef idx="2">
-          <a:schemeClr val="accent1"/>
-        </a:effectRef>
-        <a:fontRef idx="minor">
-          <a:schemeClr val="lt1"/>
-        </a:fontRef>
-      </a:style>
-    </a:spDef>
     <a:lnDef>
       <a:spPr/>
       <a:bodyPr/>
@@ -13215,5 +13065,10 @@
     </a:lnDef>
   </a:objectDefaults>
   <a:extraClrSchemeLst/>
+  <a:extLst>
+    <a:ext uri="{05A4C25C-085E-4340-85A3-A5531E510DB2}">
+      <thm15:themeFamily xmlns:thm15="http://schemas.microsoft.com/office/thememl/2012/main" name="Office Theme" id="{2E142A2C-CD16-42D6-873A-C26D2A0506FA}" vid="{1BDDFF52-6CD6-40A5-AB3C-68EB2F1E4D0A}"/>
+    </a:ext>
+  </a:extLst>
 </a:theme>
 </file>